--- a/latex/final_presentation/timeline_base.pptx
+++ b/latex/final_presentation/timeline_base.pptx
@@ -3123,9 +3123,9 @@
             <a:r>
               <a:rPr sz="4200" b="1">
                 <a:solidFill>
-                  <a:srgbClr val="1F2023"/>
-                </a:solidFill>
-                <a:latin typeface="Arial"/>
+                  <a:srgbClr val="808080"/>
+                </a:solidFill>
+                <a:latin typeface="Calibri"/>
               </a:rPr>
               <a:t>FL-Trilemma: Project Timeline</a:t>
             </a:r>
@@ -3160,7 +3160,7 @@
                 <a:solidFill>
                   <a:srgbClr val="6B7280"/>
                 </a:solidFill>
-                <a:latin typeface="Arial"/>
+                <a:latin typeface="Calibri"/>
               </a:rPr>
               <a:t>From kick-off to final presentation</a:t>
             </a:r>
@@ -3195,13 +3195,73 @@
                 <a:solidFill>
                   <a:srgbClr val="4B5563"/>
                 </a:solidFill>
-                <a:latin typeface="Arial"/>
+                <a:latin typeface="Calibri"/>
               </a:rPr>
               <a:t>Jonas Müller  ·  Rebekka Schnoor</a:t>
             </a:r>
           </a:p>
         </p:txBody>
       </p:sp>
+      <p:cxnSp>
+        <p:nvCxnSpPr>
+          <p:cNvPr id="5" name="divider_title"/>
+          <p:cNvCxnSpPr/>
+          <p:nvPr/>
+        </p:nvCxnSpPr>
+        <p:spPr>
+          <a:xfrm>
+            <a:off x="1143000" y="1905000"/>
+            <a:ext cx="16002000" cy="0"/>
+          </a:xfrm>
+          <a:prstGeom prst="line">
+            <a:avLst/>
+          </a:prstGeom>
+          <a:ln w="19050">
+            <a:solidFill>
+              <a:srgbClr val="B3B3B3"/>
+            </a:solidFill>
+          </a:ln>
+          <a:effectLst/>
+        </p:spPr>
+        <p:style>
+          <a:lnRef idx="2">
+            <a:schemeClr val="accent1"/>
+          </a:lnRef>
+          <a:fillRef idx="0">
+            <a:schemeClr val="accent1"/>
+          </a:fillRef>
+          <a:effectRef idx="1">
+            <a:schemeClr val="accent1"/>
+          </a:effectRef>
+          <a:fontRef idx="minor">
+            <a:schemeClr val="tx1"/>
+          </a:fontRef>
+        </p:style>
+      </p:cxnSp>
+      <p:pic>
+        <p:nvPicPr>
+          <p:cNvPr id="6" name="logo_title" descr="uhh_logo.png"/>
+          <p:cNvPicPr>
+            <a:picLocks noChangeAspect="1"/>
+          </p:cNvPicPr>
+          <p:nvPr/>
+        </p:nvPicPr>
+        <p:blipFill>
+          <a:blip r:embed="rId2"/>
+          <a:stretch>
+            <a:fillRect/>
+          </a:stretch>
+        </p:blipFill>
+        <p:spPr>
+          <a:xfrm>
+            <a:off x="14478000" y="571500"/>
+            <a:ext cx="2857500" cy="1183517"/>
+          </a:xfrm>
+          <a:prstGeom prst="rect">
+            <a:avLst/>
+          </a:prstGeom>
+        </p:spPr>
+      </p:pic>
     </p:spTree>
   </p:cSld>
   <p:clrMapOvr>
@@ -3249,9 +3309,9 @@
             <a:r>
               <a:rPr sz="4200" b="1">
                 <a:solidFill>
-                  <a:srgbClr val="1F2023"/>
-                </a:solidFill>
-                <a:latin typeface="Arial"/>
+                  <a:srgbClr val="808080"/>
+                </a:solidFill>
+                <a:latin typeface="Calibri"/>
               </a:rPr>
               <a:t>FL-Trilemma: Project Timeline</a:t>
             </a:r>
@@ -3286,16 +3346,52 @@
                 <a:solidFill>
                   <a:srgbClr val="6B7280"/>
                 </a:solidFill>
-                <a:latin typeface="Arial"/>
+                <a:latin typeface="Calibri"/>
               </a:rPr>
               <a:t>From kick-off to final presentation</a:t>
             </a:r>
           </a:p>
         </p:txBody>
       </p:sp>
-      <p:sp>
-        <p:nvSpPr>
-          <p:cNvPr id="4" name="content_placeholder_m8"/>
+      <p:cxnSp>
+        <p:nvCxnSpPr>
+          <p:cNvPr id="4" name="divider_m8"/>
+          <p:cNvCxnSpPr/>
+          <p:nvPr/>
+        </p:nvCxnSpPr>
+        <p:spPr>
+          <a:xfrm>
+            <a:off x="1143000" y="1905000"/>
+            <a:ext cx="16002000" cy="0"/>
+          </a:xfrm>
+          <a:prstGeom prst="line">
+            <a:avLst/>
+          </a:prstGeom>
+          <a:ln w="19050">
+            <a:solidFill>
+              <a:srgbClr val="B3B3B3"/>
+            </a:solidFill>
+          </a:ln>
+          <a:effectLst/>
+        </p:spPr>
+        <p:style>
+          <a:lnRef idx="2">
+            <a:schemeClr val="accent1"/>
+          </a:lnRef>
+          <a:fillRef idx="0">
+            <a:schemeClr val="accent1"/>
+          </a:fillRef>
+          <a:effectRef idx="1">
+            <a:schemeClr val="accent1"/>
+          </a:effectRef>
+          <a:fontRef idx="minor">
+            <a:schemeClr val="tx1"/>
+          </a:fontRef>
+        </p:style>
+      </p:cxnSp>
+      <p:sp>
+        <p:nvSpPr>
+          <p:cNvPr id="5" name="content_placeholder_m8"/>
           <p:cNvSpPr/>
           <p:nvPr/>
         </p:nvSpPr>
@@ -3353,7 +3449,7 @@
       </p:sp>
       <p:sp>
         <p:nvSpPr>
-          <p:cNvPr id="5" name="content_pill_m8"/>
+          <p:cNvPr id="6" name="content_pill_m8"/>
           <p:cNvSpPr/>
           <p:nvPr/>
         </p:nvSpPr>
@@ -3368,7 +3464,7 @@
             </a:avLst>
           </a:prstGeom>
           <a:solidFill>
-            <a:srgbClr val="EAF1FB"/>
+            <a:srgbClr val="C9E1FF"/>
           </a:solidFill>
           <a:ln>
             <a:noFill/>
@@ -3397,9 +3493,9 @@
             <a:r>
               <a:rPr sz="1800" b="1">
                 <a:solidFill>
-                  <a:srgbClr val="245C9E"/>
-                </a:solidFill>
-                <a:latin typeface="Arial"/>
+                  <a:srgbClr val="325786"/>
+                </a:solidFill>
+                <a:latin typeface="Calibri"/>
               </a:rPr>
               <a:t>20.07.2026</a:t>
             </a:r>
@@ -3408,7 +3504,7 @@
       </p:sp>
       <p:sp>
         <p:nvSpPr>
-          <p:cNvPr id="6" name="content_headline_m8"/>
+          <p:cNvPr id="7" name="content_headline_m8"/>
           <p:cNvSpPr txBox="1"/>
           <p:nvPr/>
         </p:nvSpPr>
@@ -3434,7 +3530,7 @@
                 <a:solidFill>
                   <a:srgbClr val="1F2023"/>
                 </a:solidFill>
-                <a:latin typeface="Arial"/>
+                <a:latin typeface="Calibri"/>
               </a:rPr>
               <a:t>Final Presentation</a:t>
             </a:r>
@@ -3443,7 +3539,7 @@
       </p:sp>
       <p:sp>
         <p:nvSpPr>
-          <p:cNvPr id="7" name="content_bullets_m8"/>
+          <p:cNvPr id="8" name="content_bullets_m8"/>
           <p:cNvSpPr txBox="1"/>
           <p:nvPr/>
         </p:nvSpPr>
@@ -3471,18 +3567,18 @@
             <a:r>
               <a:rPr sz="1950" b="1">
                 <a:solidFill>
-                  <a:srgbClr val="245C9E"/>
-                </a:solidFill>
-                <a:latin typeface="Arial"/>
+                  <a:srgbClr val="C1212A"/>
+                </a:solidFill>
+                <a:latin typeface="Calibri"/>
               </a:rPr>
               <a:t>-  </a:t>
             </a:r>
             <a:r>
               <a:rPr sz="1950">
                 <a:solidFill>
-                  <a:srgbClr val="4B5563"/>
-                </a:solidFill>
-                <a:latin typeface="Arial"/>
+                  <a:srgbClr val="325786"/>
+                </a:solidFill>
+                <a:latin typeface="Calibri"/>
               </a:rPr>
               <a:t>Closing presentation of findings</a:t>
             </a:r>
@@ -3491,7 +3587,7 @@
       </p:sp>
       <p:sp>
         <p:nvSpPr>
-          <p:cNvPr id="8" name="!!tl_track"/>
+          <p:cNvPr id="9" name="!!tl_track"/>
           <p:cNvSpPr/>
           <p:nvPr/>
         </p:nvSpPr>
@@ -3537,7 +3633,7 @@
       </p:sp>
       <p:sp>
         <p:nvSpPr>
-          <p:cNvPr id="9" name="!!tl_fill"/>
+          <p:cNvPr id="10" name="!!tl_fill"/>
           <p:cNvSpPr/>
           <p:nvPr/>
         </p:nvSpPr>
@@ -3552,7 +3648,7 @@
             </a:avLst>
           </a:prstGeom>
           <a:solidFill>
-            <a:srgbClr val="245C9E"/>
+            <a:srgbClr val="325786"/>
           </a:solidFill>
           <a:ln>
             <a:noFill/>
@@ -3583,7 +3679,7 @@
       </p:sp>
       <p:sp>
         <p:nvSpPr>
-          <p:cNvPr id="10" name="!!tl_dot_1"/>
+          <p:cNvPr id="11" name="!!tl_dot_1"/>
           <p:cNvSpPr/>
           <p:nvPr/>
         </p:nvSpPr>
@@ -3627,7 +3723,7 @@
       </p:sp>
       <p:sp>
         <p:nvSpPr>
-          <p:cNvPr id="11" name="lbl_1_s8"/>
+          <p:cNvPr id="12" name="lbl_1_s8"/>
           <p:cNvSpPr txBox="1"/>
           <p:nvPr/>
         </p:nvSpPr>
@@ -3653,7 +3749,7 @@
                 <a:solidFill>
                   <a:srgbClr val="9CA3AF"/>
                 </a:solidFill>
-                <a:latin typeface="Arial"/>
+                <a:latin typeface="Calibri"/>
               </a:rPr>
               <a:t>09.04.2026</a:t>
             </a:r>
@@ -3662,7 +3758,7 @@
       </p:sp>
       <p:sp>
         <p:nvSpPr>
-          <p:cNvPr id="12" name="!!tl_dot_2"/>
+          <p:cNvPr id="13" name="!!tl_dot_2"/>
           <p:cNvSpPr/>
           <p:nvPr/>
         </p:nvSpPr>
@@ -3706,7 +3802,7 @@
       </p:sp>
       <p:sp>
         <p:nvSpPr>
-          <p:cNvPr id="13" name="lbl_2_s8"/>
+          <p:cNvPr id="14" name="lbl_2_s8"/>
           <p:cNvSpPr txBox="1"/>
           <p:nvPr/>
         </p:nvSpPr>
@@ -3732,7 +3828,7 @@
                 <a:solidFill>
                   <a:srgbClr val="9CA3AF"/>
                 </a:solidFill>
-                <a:latin typeface="Arial"/>
+                <a:latin typeface="Calibri"/>
               </a:rPr>
               <a:t>16.04.2026</a:t>
             </a:r>
@@ -3741,7 +3837,7 @@
       </p:sp>
       <p:sp>
         <p:nvSpPr>
-          <p:cNvPr id="14" name="!!tl_dot_3"/>
+          <p:cNvPr id="15" name="!!tl_dot_3"/>
           <p:cNvSpPr/>
           <p:nvPr/>
         </p:nvSpPr>
@@ -3785,7 +3881,7 @@
       </p:sp>
       <p:sp>
         <p:nvSpPr>
-          <p:cNvPr id="15" name="lbl_3_s8"/>
+          <p:cNvPr id="16" name="lbl_3_s8"/>
           <p:cNvSpPr txBox="1"/>
           <p:nvPr/>
         </p:nvSpPr>
@@ -3811,7 +3907,7 @@
                 <a:solidFill>
                   <a:srgbClr val="9CA3AF"/>
                 </a:solidFill>
-                <a:latin typeface="Arial"/>
+                <a:latin typeface="Calibri"/>
               </a:rPr>
               <a:t>30.04.2026</a:t>
             </a:r>
@@ -3820,7 +3916,7 @@
       </p:sp>
       <p:sp>
         <p:nvSpPr>
-          <p:cNvPr id="16" name="!!tl_dot_4"/>
+          <p:cNvPr id="17" name="!!tl_dot_4"/>
           <p:cNvSpPr/>
           <p:nvPr/>
         </p:nvSpPr>
@@ -3864,7 +3960,7 @@
       </p:sp>
       <p:sp>
         <p:nvSpPr>
-          <p:cNvPr id="17" name="lbl_4_s8"/>
+          <p:cNvPr id="18" name="lbl_4_s8"/>
           <p:cNvSpPr txBox="1"/>
           <p:nvPr/>
         </p:nvSpPr>
@@ -3890,7 +3986,7 @@
                 <a:solidFill>
                   <a:srgbClr val="9CA3AF"/>
                 </a:solidFill>
-                <a:latin typeface="Arial"/>
+                <a:latin typeface="Calibri"/>
               </a:rPr>
               <a:t>~21.05.2026</a:t>
             </a:r>
@@ -3899,7 +3995,7 @@
       </p:sp>
       <p:sp>
         <p:nvSpPr>
-          <p:cNvPr id="18" name="!!tl_dot_5"/>
+          <p:cNvPr id="19" name="!!tl_dot_5"/>
           <p:cNvSpPr/>
           <p:nvPr/>
         </p:nvSpPr>
@@ -3943,7 +4039,7 @@
       </p:sp>
       <p:sp>
         <p:nvSpPr>
-          <p:cNvPr id="19" name="lbl_5_s8"/>
+          <p:cNvPr id="20" name="lbl_5_s8"/>
           <p:cNvSpPr txBox="1"/>
           <p:nvPr/>
         </p:nvSpPr>
@@ -3969,7 +4065,7 @@
                 <a:solidFill>
                   <a:srgbClr val="9CA3AF"/>
                 </a:solidFill>
-                <a:latin typeface="Arial"/>
+                <a:latin typeface="Calibri"/>
               </a:rPr>
               <a:t>18.06.2026</a:t>
             </a:r>
@@ -3978,7 +4074,7 @@
       </p:sp>
       <p:sp>
         <p:nvSpPr>
-          <p:cNvPr id="20" name="!!tl_dot_6"/>
+          <p:cNvPr id="21" name="!!tl_dot_6"/>
           <p:cNvSpPr/>
           <p:nvPr/>
         </p:nvSpPr>
@@ -4022,7 +4118,7 @@
       </p:sp>
       <p:sp>
         <p:nvSpPr>
-          <p:cNvPr id="21" name="lbl_6_s8"/>
+          <p:cNvPr id="22" name="lbl_6_s8"/>
           <p:cNvSpPr txBox="1"/>
           <p:nvPr/>
         </p:nvSpPr>
@@ -4048,7 +4144,7 @@
                 <a:solidFill>
                   <a:srgbClr val="9CA3AF"/>
                 </a:solidFill>
-                <a:latin typeface="Arial"/>
+                <a:latin typeface="Calibri"/>
               </a:rPr>
               <a:t>25.06.2026</a:t>
             </a:r>
@@ -4057,7 +4153,7 @@
       </p:sp>
       <p:sp>
         <p:nvSpPr>
-          <p:cNvPr id="22" name="!!tl_dot_7"/>
+          <p:cNvPr id="23" name="!!tl_dot_7"/>
           <p:cNvSpPr/>
           <p:nvPr/>
         </p:nvSpPr>
@@ -4101,7 +4197,7 @@
       </p:sp>
       <p:sp>
         <p:nvSpPr>
-          <p:cNvPr id="23" name="lbl_7_s8"/>
+          <p:cNvPr id="24" name="lbl_7_s8"/>
           <p:cNvSpPr txBox="1"/>
           <p:nvPr/>
         </p:nvSpPr>
@@ -4127,7 +4223,7 @@
                 <a:solidFill>
                   <a:srgbClr val="9CA3AF"/>
                 </a:solidFill>
-                <a:latin typeface="Arial"/>
+                <a:latin typeface="Calibri"/>
               </a:rPr>
               <a:t>09.07.2026</a:t>
             </a:r>
@@ -4136,7 +4232,7 @@
       </p:sp>
       <p:sp>
         <p:nvSpPr>
-          <p:cNvPr id="24" name="!!tl_dot_8"/>
+          <p:cNvPr id="25" name="!!tl_dot_8"/>
           <p:cNvSpPr/>
           <p:nvPr/>
         </p:nvSpPr>
@@ -4180,7 +4276,7 @@
       </p:sp>
       <p:sp>
         <p:nvSpPr>
-          <p:cNvPr id="25" name="lbl_8_s8"/>
+          <p:cNvPr id="26" name="lbl_8_s8"/>
           <p:cNvSpPr txBox="1"/>
           <p:nvPr/>
         </p:nvSpPr>
@@ -4206,7 +4302,7 @@
                 <a:solidFill>
                   <a:srgbClr val="9CA3AF"/>
                 </a:solidFill>
-                <a:latin typeface="Arial"/>
+                <a:latin typeface="Calibri"/>
               </a:rPr>
               <a:t>16.07.2026</a:t>
             </a:r>
@@ -4215,7 +4311,7 @@
       </p:sp>
       <p:sp>
         <p:nvSpPr>
-          <p:cNvPr id="26" name="!!tl_dot_9"/>
+          <p:cNvPr id="27" name="!!tl_dot_9"/>
           <p:cNvSpPr/>
           <p:nvPr/>
         </p:nvSpPr>
@@ -4228,7 +4324,7 @@
             <a:avLst/>
           </a:prstGeom>
           <a:solidFill>
-            <a:srgbClr val="245C9E"/>
+            <a:srgbClr val="325786"/>
           </a:solidFill>
           <a:ln>
             <a:noFill/>
@@ -4259,7 +4355,7 @@
       </p:sp>
       <p:sp>
         <p:nvSpPr>
-          <p:cNvPr id="27" name="lbl_9_s8"/>
+          <p:cNvPr id="28" name="lbl_9_s8"/>
           <p:cNvSpPr txBox="1"/>
           <p:nvPr/>
         </p:nvSpPr>
@@ -4285,7 +4381,7 @@
                 <a:solidFill>
                   <a:srgbClr val="1F2023"/>
                 </a:solidFill>
-                <a:latin typeface="Arial"/>
+                <a:latin typeface="Calibri"/>
               </a:rPr>
               <a:t>20.07.2026</a:t>
             </a:r>
@@ -4348,9 +4444,9 @@
             <a:r>
               <a:rPr sz="4200" b="1">
                 <a:solidFill>
-                  <a:srgbClr val="1F2023"/>
-                </a:solidFill>
-                <a:latin typeface="Arial"/>
+                  <a:srgbClr val="808080"/>
+                </a:solidFill>
+                <a:latin typeface="Calibri"/>
               </a:rPr>
               <a:t>FL-Trilemma: Project Timeline</a:t>
             </a:r>
@@ -4385,16 +4481,52 @@
                 <a:solidFill>
                   <a:srgbClr val="6B7280"/>
                 </a:solidFill>
-                <a:latin typeface="Arial"/>
+                <a:latin typeface="Calibri"/>
               </a:rPr>
               <a:t>From kick-off to final presentation</a:t>
             </a:r>
           </a:p>
         </p:txBody>
       </p:sp>
-      <p:sp>
-        <p:nvSpPr>
-          <p:cNvPr id="4" name="content_pill_m0"/>
+      <p:cxnSp>
+        <p:nvCxnSpPr>
+          <p:cNvPr id="4" name="divider_m0"/>
+          <p:cNvCxnSpPr/>
+          <p:nvPr/>
+        </p:nvCxnSpPr>
+        <p:spPr>
+          <a:xfrm>
+            <a:off x="1143000" y="1905000"/>
+            <a:ext cx="16002000" cy="0"/>
+          </a:xfrm>
+          <a:prstGeom prst="line">
+            <a:avLst/>
+          </a:prstGeom>
+          <a:ln w="19050">
+            <a:solidFill>
+              <a:srgbClr val="B3B3B3"/>
+            </a:solidFill>
+          </a:ln>
+          <a:effectLst/>
+        </p:spPr>
+        <p:style>
+          <a:lnRef idx="2">
+            <a:schemeClr val="accent1"/>
+          </a:lnRef>
+          <a:fillRef idx="0">
+            <a:schemeClr val="accent1"/>
+          </a:fillRef>
+          <a:effectRef idx="1">
+            <a:schemeClr val="accent1"/>
+          </a:effectRef>
+          <a:fontRef idx="minor">
+            <a:schemeClr val="tx1"/>
+          </a:fontRef>
+        </p:style>
+      </p:cxnSp>
+      <p:sp>
+        <p:nvSpPr>
+          <p:cNvPr id="5" name="content_pill_m0"/>
           <p:cNvSpPr/>
           <p:nvPr/>
         </p:nvSpPr>
@@ -4409,7 +4541,7 @@
             </a:avLst>
           </a:prstGeom>
           <a:solidFill>
-            <a:srgbClr val="EAF1FB"/>
+            <a:srgbClr val="C9E1FF"/>
           </a:solidFill>
           <a:ln>
             <a:noFill/>
@@ -4438,9 +4570,9 @@
             <a:r>
               <a:rPr sz="1800" b="1">
                 <a:solidFill>
-                  <a:srgbClr val="245C9E"/>
-                </a:solidFill>
-                <a:latin typeface="Arial"/>
+                  <a:srgbClr val="325786"/>
+                </a:solidFill>
+                <a:latin typeface="Calibri"/>
               </a:rPr>
               <a:t>09.04.2026</a:t>
             </a:r>
@@ -4449,7 +4581,7 @@
       </p:sp>
       <p:sp>
         <p:nvSpPr>
-          <p:cNvPr id="5" name="content_headline_m0"/>
+          <p:cNvPr id="6" name="content_headline_m0"/>
           <p:cNvSpPr txBox="1"/>
           <p:nvPr/>
         </p:nvSpPr>
@@ -4475,7 +4607,7 @@
                 <a:solidFill>
                   <a:srgbClr val="1F2023"/>
                 </a:solidFill>
-                <a:latin typeface="Arial"/>
+                <a:latin typeface="Calibri"/>
               </a:rPr>
               <a:t>Project Kick-off</a:t>
             </a:r>
@@ -4484,7 +4616,7 @@
       </p:sp>
       <p:sp>
         <p:nvSpPr>
-          <p:cNvPr id="6" name="content_bullets_m0"/>
+          <p:cNvPr id="7" name="content_bullets_m0"/>
           <p:cNvSpPr txBox="1"/>
           <p:nvPr/>
         </p:nvSpPr>
@@ -4512,18 +4644,18 @@
             <a:r>
               <a:rPr sz="2100" b="1">
                 <a:solidFill>
-                  <a:srgbClr val="245C9E"/>
-                </a:solidFill>
-                <a:latin typeface="Arial"/>
+                  <a:srgbClr val="C1212A"/>
+                </a:solidFill>
+                <a:latin typeface="Calibri"/>
               </a:rPr>
               <a:t>-  </a:t>
             </a:r>
             <a:r>
               <a:rPr sz="2100">
                 <a:solidFill>
-                  <a:srgbClr val="4B5563"/>
-                </a:solidFill>
-                <a:latin typeface="Arial"/>
+                  <a:srgbClr val="325786"/>
+                </a:solidFill>
+                <a:latin typeface="Calibri"/>
               </a:rPr>
               <a:t>Master Project Seminar Data Protection and Data Security begins</a:t>
             </a:r>
@@ -4532,7 +4664,7 @@
       </p:sp>
       <p:sp>
         <p:nvSpPr>
-          <p:cNvPr id="7" name="!!tl_track"/>
+          <p:cNvPr id="8" name="!!tl_track"/>
           <p:cNvSpPr/>
           <p:nvPr/>
         </p:nvSpPr>
@@ -4578,7 +4710,7 @@
       </p:sp>
       <p:sp>
         <p:nvSpPr>
-          <p:cNvPr id="8" name="!!tl_fill"/>
+          <p:cNvPr id="9" name="!!tl_fill"/>
           <p:cNvSpPr/>
           <p:nvPr/>
         </p:nvSpPr>
@@ -4593,7 +4725,7 @@
             </a:avLst>
           </a:prstGeom>
           <a:solidFill>
-            <a:srgbClr val="245C9E"/>
+            <a:srgbClr val="325786"/>
           </a:solidFill>
           <a:ln>
             <a:noFill/>
@@ -4624,7 +4756,7 @@
       </p:sp>
       <p:sp>
         <p:nvSpPr>
-          <p:cNvPr id="9" name="!!tl_dot_1"/>
+          <p:cNvPr id="10" name="!!tl_dot_1"/>
           <p:cNvSpPr/>
           <p:nvPr/>
         </p:nvSpPr>
@@ -4637,7 +4769,7 @@
             <a:avLst/>
           </a:prstGeom>
           <a:solidFill>
-            <a:srgbClr val="245C9E"/>
+            <a:srgbClr val="325786"/>
           </a:solidFill>
           <a:ln>
             <a:noFill/>
@@ -4668,7 +4800,7 @@
       </p:sp>
       <p:sp>
         <p:nvSpPr>
-          <p:cNvPr id="10" name="lbl_1_s0"/>
+          <p:cNvPr id="11" name="lbl_1_s0"/>
           <p:cNvSpPr txBox="1"/>
           <p:nvPr/>
         </p:nvSpPr>
@@ -4694,7 +4826,7 @@
                 <a:solidFill>
                   <a:srgbClr val="1F2023"/>
                 </a:solidFill>
-                <a:latin typeface="Arial"/>
+                <a:latin typeface="Calibri"/>
               </a:rPr>
               <a:t>09.04.2026</a:t>
             </a:r>
@@ -4703,7 +4835,7 @@
       </p:sp>
       <p:sp>
         <p:nvSpPr>
-          <p:cNvPr id="11" name="!!tl_dot_2"/>
+          <p:cNvPr id="12" name="!!tl_dot_2"/>
           <p:cNvSpPr/>
           <p:nvPr/>
         </p:nvSpPr>
@@ -4747,7 +4879,7 @@
       </p:sp>
       <p:sp>
         <p:nvSpPr>
-          <p:cNvPr id="12" name="lbl_2_s0"/>
+          <p:cNvPr id="13" name="lbl_2_s0"/>
           <p:cNvSpPr txBox="1"/>
           <p:nvPr/>
         </p:nvSpPr>
@@ -4773,7 +4905,7 @@
                 <a:solidFill>
                   <a:srgbClr val="9CA3AF"/>
                 </a:solidFill>
-                <a:latin typeface="Arial"/>
+                <a:latin typeface="Calibri"/>
               </a:rPr>
               <a:t>16.04.2026</a:t>
             </a:r>
@@ -4782,7 +4914,7 @@
       </p:sp>
       <p:sp>
         <p:nvSpPr>
-          <p:cNvPr id="13" name="!!tl_dot_3"/>
+          <p:cNvPr id="14" name="!!tl_dot_3"/>
           <p:cNvSpPr/>
           <p:nvPr/>
         </p:nvSpPr>
@@ -4826,7 +4958,7 @@
       </p:sp>
       <p:sp>
         <p:nvSpPr>
-          <p:cNvPr id="14" name="lbl_3_s0"/>
+          <p:cNvPr id="15" name="lbl_3_s0"/>
           <p:cNvSpPr txBox="1"/>
           <p:nvPr/>
         </p:nvSpPr>
@@ -4852,7 +4984,7 @@
                 <a:solidFill>
                   <a:srgbClr val="9CA3AF"/>
                 </a:solidFill>
-                <a:latin typeface="Arial"/>
+                <a:latin typeface="Calibri"/>
               </a:rPr>
               <a:t>30.04.2026</a:t>
             </a:r>
@@ -4861,7 +4993,7 @@
       </p:sp>
       <p:sp>
         <p:nvSpPr>
-          <p:cNvPr id="15" name="!!tl_dot_4"/>
+          <p:cNvPr id="16" name="!!tl_dot_4"/>
           <p:cNvSpPr/>
           <p:nvPr/>
         </p:nvSpPr>
@@ -4905,7 +5037,7 @@
       </p:sp>
       <p:sp>
         <p:nvSpPr>
-          <p:cNvPr id="16" name="lbl_4_s0"/>
+          <p:cNvPr id="17" name="lbl_4_s0"/>
           <p:cNvSpPr txBox="1"/>
           <p:nvPr/>
         </p:nvSpPr>
@@ -4931,7 +5063,7 @@
                 <a:solidFill>
                   <a:srgbClr val="9CA3AF"/>
                 </a:solidFill>
-                <a:latin typeface="Arial"/>
+                <a:latin typeface="Calibri"/>
               </a:rPr>
               <a:t>~21.05.2026</a:t>
             </a:r>
@@ -4940,7 +5072,7 @@
       </p:sp>
       <p:sp>
         <p:nvSpPr>
-          <p:cNvPr id="17" name="!!tl_dot_5"/>
+          <p:cNvPr id="18" name="!!tl_dot_5"/>
           <p:cNvSpPr/>
           <p:nvPr/>
         </p:nvSpPr>
@@ -4984,7 +5116,7 @@
       </p:sp>
       <p:sp>
         <p:nvSpPr>
-          <p:cNvPr id="18" name="lbl_5_s0"/>
+          <p:cNvPr id="19" name="lbl_5_s0"/>
           <p:cNvSpPr txBox="1"/>
           <p:nvPr/>
         </p:nvSpPr>
@@ -5010,7 +5142,7 @@
                 <a:solidFill>
                   <a:srgbClr val="9CA3AF"/>
                 </a:solidFill>
-                <a:latin typeface="Arial"/>
+                <a:latin typeface="Calibri"/>
               </a:rPr>
               <a:t>18.06.2026</a:t>
             </a:r>
@@ -5019,7 +5151,7 @@
       </p:sp>
       <p:sp>
         <p:nvSpPr>
-          <p:cNvPr id="19" name="!!tl_dot_6"/>
+          <p:cNvPr id="20" name="!!tl_dot_6"/>
           <p:cNvSpPr/>
           <p:nvPr/>
         </p:nvSpPr>
@@ -5063,7 +5195,7 @@
       </p:sp>
       <p:sp>
         <p:nvSpPr>
-          <p:cNvPr id="20" name="lbl_6_s0"/>
+          <p:cNvPr id="21" name="lbl_6_s0"/>
           <p:cNvSpPr txBox="1"/>
           <p:nvPr/>
         </p:nvSpPr>
@@ -5089,7 +5221,7 @@
                 <a:solidFill>
                   <a:srgbClr val="9CA3AF"/>
                 </a:solidFill>
-                <a:latin typeface="Arial"/>
+                <a:latin typeface="Calibri"/>
               </a:rPr>
               <a:t>25.06.2026</a:t>
             </a:r>
@@ -5098,7 +5230,7 @@
       </p:sp>
       <p:sp>
         <p:nvSpPr>
-          <p:cNvPr id="21" name="!!tl_dot_7"/>
+          <p:cNvPr id="22" name="!!tl_dot_7"/>
           <p:cNvSpPr/>
           <p:nvPr/>
         </p:nvSpPr>
@@ -5142,7 +5274,7 @@
       </p:sp>
       <p:sp>
         <p:nvSpPr>
-          <p:cNvPr id="22" name="lbl_7_s0"/>
+          <p:cNvPr id="23" name="lbl_7_s0"/>
           <p:cNvSpPr txBox="1"/>
           <p:nvPr/>
         </p:nvSpPr>
@@ -5168,7 +5300,7 @@
                 <a:solidFill>
                   <a:srgbClr val="9CA3AF"/>
                 </a:solidFill>
-                <a:latin typeface="Arial"/>
+                <a:latin typeface="Calibri"/>
               </a:rPr>
               <a:t>09.07.2026</a:t>
             </a:r>
@@ -5177,7 +5309,7 @@
       </p:sp>
       <p:sp>
         <p:nvSpPr>
-          <p:cNvPr id="23" name="!!tl_dot_8"/>
+          <p:cNvPr id="24" name="!!tl_dot_8"/>
           <p:cNvSpPr/>
           <p:nvPr/>
         </p:nvSpPr>
@@ -5221,7 +5353,7 @@
       </p:sp>
       <p:sp>
         <p:nvSpPr>
-          <p:cNvPr id="24" name="lbl_8_s0"/>
+          <p:cNvPr id="25" name="lbl_8_s0"/>
           <p:cNvSpPr txBox="1"/>
           <p:nvPr/>
         </p:nvSpPr>
@@ -5247,7 +5379,7 @@
                 <a:solidFill>
                   <a:srgbClr val="9CA3AF"/>
                 </a:solidFill>
-                <a:latin typeface="Arial"/>
+                <a:latin typeface="Calibri"/>
               </a:rPr>
               <a:t>16.07.2026</a:t>
             </a:r>
@@ -5256,7 +5388,7 @@
       </p:sp>
       <p:sp>
         <p:nvSpPr>
-          <p:cNvPr id="25" name="!!tl_dot_9"/>
+          <p:cNvPr id="26" name="!!tl_dot_9"/>
           <p:cNvSpPr/>
           <p:nvPr/>
         </p:nvSpPr>
@@ -5300,7 +5432,7 @@
       </p:sp>
       <p:sp>
         <p:nvSpPr>
-          <p:cNvPr id="26" name="lbl_9_s0"/>
+          <p:cNvPr id="27" name="lbl_9_s0"/>
           <p:cNvSpPr txBox="1"/>
           <p:nvPr/>
         </p:nvSpPr>
@@ -5326,7 +5458,7 @@
                 <a:solidFill>
                   <a:srgbClr val="9CA3AF"/>
                 </a:solidFill>
-                <a:latin typeface="Arial"/>
+                <a:latin typeface="Calibri"/>
               </a:rPr>
               <a:t>20.07.2026</a:t>
             </a:r>
@@ -5389,9 +5521,9 @@
             <a:r>
               <a:rPr sz="4200" b="1">
                 <a:solidFill>
-                  <a:srgbClr val="1F2023"/>
-                </a:solidFill>
-                <a:latin typeface="Arial"/>
+                  <a:srgbClr val="808080"/>
+                </a:solidFill>
+                <a:latin typeface="Calibri"/>
               </a:rPr>
               <a:t>FL-Trilemma: Project Timeline</a:t>
             </a:r>
@@ -5426,16 +5558,52 @@
                 <a:solidFill>
                   <a:srgbClr val="6B7280"/>
                 </a:solidFill>
-                <a:latin typeface="Arial"/>
+                <a:latin typeface="Calibri"/>
               </a:rPr>
               <a:t>From kick-off to final presentation</a:t>
             </a:r>
           </a:p>
         </p:txBody>
       </p:sp>
-      <p:sp>
-        <p:nvSpPr>
-          <p:cNvPr id="4" name="content_pill_m1"/>
+      <p:cxnSp>
+        <p:nvCxnSpPr>
+          <p:cNvPr id="4" name="divider_m1"/>
+          <p:cNvCxnSpPr/>
+          <p:nvPr/>
+        </p:nvCxnSpPr>
+        <p:spPr>
+          <a:xfrm>
+            <a:off x="1143000" y="1905000"/>
+            <a:ext cx="16002000" cy="0"/>
+          </a:xfrm>
+          <a:prstGeom prst="line">
+            <a:avLst/>
+          </a:prstGeom>
+          <a:ln w="19050">
+            <a:solidFill>
+              <a:srgbClr val="B3B3B3"/>
+            </a:solidFill>
+          </a:ln>
+          <a:effectLst/>
+        </p:spPr>
+        <p:style>
+          <a:lnRef idx="2">
+            <a:schemeClr val="accent1"/>
+          </a:lnRef>
+          <a:fillRef idx="0">
+            <a:schemeClr val="accent1"/>
+          </a:fillRef>
+          <a:effectRef idx="1">
+            <a:schemeClr val="accent1"/>
+          </a:effectRef>
+          <a:fontRef idx="minor">
+            <a:schemeClr val="tx1"/>
+          </a:fontRef>
+        </p:style>
+      </p:cxnSp>
+      <p:sp>
+        <p:nvSpPr>
+          <p:cNvPr id="5" name="content_pill_m1"/>
           <p:cNvSpPr/>
           <p:nvPr/>
         </p:nvSpPr>
@@ -5450,7 +5618,7 @@
             </a:avLst>
           </a:prstGeom>
           <a:solidFill>
-            <a:srgbClr val="EAF1FB"/>
+            <a:srgbClr val="C9E1FF"/>
           </a:solidFill>
           <a:ln>
             <a:noFill/>
@@ -5479,9 +5647,9 @@
             <a:r>
               <a:rPr sz="1800" b="1">
                 <a:solidFill>
-                  <a:srgbClr val="245C9E"/>
-                </a:solidFill>
-                <a:latin typeface="Arial"/>
+                  <a:srgbClr val="325786"/>
+                </a:solidFill>
+                <a:latin typeface="Calibri"/>
               </a:rPr>
               <a:t>16.04.2026</a:t>
             </a:r>
@@ -5490,7 +5658,7 @@
       </p:sp>
       <p:sp>
         <p:nvSpPr>
-          <p:cNvPr id="5" name="content_headline_m1"/>
+          <p:cNvPr id="6" name="content_headline_m1"/>
           <p:cNvSpPr txBox="1"/>
           <p:nvPr/>
         </p:nvSpPr>
@@ -5516,7 +5684,7 @@
                 <a:solidFill>
                   <a:srgbClr val="1F2023"/>
                 </a:solidFill>
-                <a:latin typeface="Arial"/>
+                <a:latin typeface="Calibri"/>
               </a:rPr>
               <a:t>Schedule &amp; Topic Distribution</a:t>
             </a:r>
@@ -5525,7 +5693,7 @@
       </p:sp>
       <p:sp>
         <p:nvSpPr>
-          <p:cNvPr id="6" name="content_bullets_m1"/>
+          <p:cNvPr id="7" name="content_bullets_m1"/>
           <p:cNvSpPr txBox="1"/>
           <p:nvPr/>
         </p:nvSpPr>
@@ -5553,18 +5721,18 @@
             <a:r>
               <a:rPr sz="2100" b="1">
                 <a:solidFill>
-                  <a:srgbClr val="245C9E"/>
-                </a:solidFill>
-                <a:latin typeface="Arial"/>
+                  <a:srgbClr val="C1212A"/>
+                </a:solidFill>
+                <a:latin typeface="Calibri"/>
               </a:rPr>
               <a:t>-  </a:t>
             </a:r>
             <a:r>
               <a:rPr sz="2100">
                 <a:solidFill>
-                  <a:srgbClr val="4B5563"/>
-                </a:solidFill>
-                <a:latin typeface="Arial"/>
+                  <a:srgbClr val="325786"/>
+                </a:solidFill>
+                <a:latin typeface="Calibri"/>
               </a:rPr>
               <a:t>Presentation of project schedule and topic distribution</a:t>
             </a:r>
@@ -5573,7 +5741,7 @@
       </p:sp>
       <p:sp>
         <p:nvSpPr>
-          <p:cNvPr id="7" name="!!tl_track"/>
+          <p:cNvPr id="8" name="!!tl_track"/>
           <p:cNvSpPr/>
           <p:nvPr/>
         </p:nvSpPr>
@@ -5619,7 +5787,7 @@
       </p:sp>
       <p:sp>
         <p:nvSpPr>
-          <p:cNvPr id="8" name="!!tl_fill"/>
+          <p:cNvPr id="9" name="!!tl_fill"/>
           <p:cNvSpPr/>
           <p:nvPr/>
         </p:nvSpPr>
@@ -5634,7 +5802,7 @@
             </a:avLst>
           </a:prstGeom>
           <a:solidFill>
-            <a:srgbClr val="245C9E"/>
+            <a:srgbClr val="325786"/>
           </a:solidFill>
           <a:ln>
             <a:noFill/>
@@ -5665,7 +5833,7 @@
       </p:sp>
       <p:sp>
         <p:nvSpPr>
-          <p:cNvPr id="9" name="!!tl_dot_1"/>
+          <p:cNvPr id="10" name="!!tl_dot_1"/>
           <p:cNvSpPr/>
           <p:nvPr/>
         </p:nvSpPr>
@@ -5709,7 +5877,7 @@
       </p:sp>
       <p:sp>
         <p:nvSpPr>
-          <p:cNvPr id="10" name="lbl_1_s1"/>
+          <p:cNvPr id="11" name="lbl_1_s1"/>
           <p:cNvSpPr txBox="1"/>
           <p:nvPr/>
         </p:nvSpPr>
@@ -5735,7 +5903,7 @@
                 <a:solidFill>
                   <a:srgbClr val="9CA3AF"/>
                 </a:solidFill>
-                <a:latin typeface="Arial"/>
+                <a:latin typeface="Calibri"/>
               </a:rPr>
               <a:t>09.04.2026</a:t>
             </a:r>
@@ -5744,7 +5912,7 @@
       </p:sp>
       <p:sp>
         <p:nvSpPr>
-          <p:cNvPr id="11" name="!!tl_dot_2"/>
+          <p:cNvPr id="12" name="!!tl_dot_2"/>
           <p:cNvSpPr/>
           <p:nvPr/>
         </p:nvSpPr>
@@ -5757,7 +5925,7 @@
             <a:avLst/>
           </a:prstGeom>
           <a:solidFill>
-            <a:srgbClr val="245C9E"/>
+            <a:srgbClr val="325786"/>
           </a:solidFill>
           <a:ln>
             <a:noFill/>
@@ -5788,7 +5956,7 @@
       </p:sp>
       <p:sp>
         <p:nvSpPr>
-          <p:cNvPr id="12" name="lbl_2_s1"/>
+          <p:cNvPr id="13" name="lbl_2_s1"/>
           <p:cNvSpPr txBox="1"/>
           <p:nvPr/>
         </p:nvSpPr>
@@ -5814,7 +5982,7 @@
                 <a:solidFill>
                   <a:srgbClr val="1F2023"/>
                 </a:solidFill>
-                <a:latin typeface="Arial"/>
+                <a:latin typeface="Calibri"/>
               </a:rPr>
               <a:t>16.04.2026</a:t>
             </a:r>
@@ -5823,7 +5991,7 @@
       </p:sp>
       <p:sp>
         <p:nvSpPr>
-          <p:cNvPr id="13" name="!!tl_dot_3"/>
+          <p:cNvPr id="14" name="!!tl_dot_3"/>
           <p:cNvSpPr/>
           <p:nvPr/>
         </p:nvSpPr>
@@ -5867,7 +6035,7 @@
       </p:sp>
       <p:sp>
         <p:nvSpPr>
-          <p:cNvPr id="14" name="lbl_3_s1"/>
+          <p:cNvPr id="15" name="lbl_3_s1"/>
           <p:cNvSpPr txBox="1"/>
           <p:nvPr/>
         </p:nvSpPr>
@@ -5893,7 +6061,7 @@
                 <a:solidFill>
                   <a:srgbClr val="9CA3AF"/>
                 </a:solidFill>
-                <a:latin typeface="Arial"/>
+                <a:latin typeface="Calibri"/>
               </a:rPr>
               <a:t>30.04.2026</a:t>
             </a:r>
@@ -5902,7 +6070,7 @@
       </p:sp>
       <p:sp>
         <p:nvSpPr>
-          <p:cNvPr id="15" name="!!tl_dot_4"/>
+          <p:cNvPr id="16" name="!!tl_dot_4"/>
           <p:cNvSpPr/>
           <p:nvPr/>
         </p:nvSpPr>
@@ -5946,7 +6114,7 @@
       </p:sp>
       <p:sp>
         <p:nvSpPr>
-          <p:cNvPr id="16" name="lbl_4_s1"/>
+          <p:cNvPr id="17" name="lbl_4_s1"/>
           <p:cNvSpPr txBox="1"/>
           <p:nvPr/>
         </p:nvSpPr>
@@ -5972,7 +6140,7 @@
                 <a:solidFill>
                   <a:srgbClr val="9CA3AF"/>
                 </a:solidFill>
-                <a:latin typeface="Arial"/>
+                <a:latin typeface="Calibri"/>
               </a:rPr>
               <a:t>~21.05.2026</a:t>
             </a:r>
@@ -5981,7 +6149,7 @@
       </p:sp>
       <p:sp>
         <p:nvSpPr>
-          <p:cNvPr id="17" name="!!tl_dot_5"/>
+          <p:cNvPr id="18" name="!!tl_dot_5"/>
           <p:cNvSpPr/>
           <p:nvPr/>
         </p:nvSpPr>
@@ -6025,7 +6193,7 @@
       </p:sp>
       <p:sp>
         <p:nvSpPr>
-          <p:cNvPr id="18" name="lbl_5_s1"/>
+          <p:cNvPr id="19" name="lbl_5_s1"/>
           <p:cNvSpPr txBox="1"/>
           <p:nvPr/>
         </p:nvSpPr>
@@ -6051,7 +6219,7 @@
                 <a:solidFill>
                   <a:srgbClr val="9CA3AF"/>
                 </a:solidFill>
-                <a:latin typeface="Arial"/>
+                <a:latin typeface="Calibri"/>
               </a:rPr>
               <a:t>18.06.2026</a:t>
             </a:r>
@@ -6060,7 +6228,7 @@
       </p:sp>
       <p:sp>
         <p:nvSpPr>
-          <p:cNvPr id="19" name="!!tl_dot_6"/>
+          <p:cNvPr id="20" name="!!tl_dot_6"/>
           <p:cNvSpPr/>
           <p:nvPr/>
         </p:nvSpPr>
@@ -6104,7 +6272,7 @@
       </p:sp>
       <p:sp>
         <p:nvSpPr>
-          <p:cNvPr id="20" name="lbl_6_s1"/>
+          <p:cNvPr id="21" name="lbl_6_s1"/>
           <p:cNvSpPr txBox="1"/>
           <p:nvPr/>
         </p:nvSpPr>
@@ -6130,7 +6298,7 @@
                 <a:solidFill>
                   <a:srgbClr val="9CA3AF"/>
                 </a:solidFill>
-                <a:latin typeface="Arial"/>
+                <a:latin typeface="Calibri"/>
               </a:rPr>
               <a:t>25.06.2026</a:t>
             </a:r>
@@ -6139,7 +6307,7 @@
       </p:sp>
       <p:sp>
         <p:nvSpPr>
-          <p:cNvPr id="21" name="!!tl_dot_7"/>
+          <p:cNvPr id="22" name="!!tl_dot_7"/>
           <p:cNvSpPr/>
           <p:nvPr/>
         </p:nvSpPr>
@@ -6183,7 +6351,7 @@
       </p:sp>
       <p:sp>
         <p:nvSpPr>
-          <p:cNvPr id="22" name="lbl_7_s1"/>
+          <p:cNvPr id="23" name="lbl_7_s1"/>
           <p:cNvSpPr txBox="1"/>
           <p:nvPr/>
         </p:nvSpPr>
@@ -6209,7 +6377,7 @@
                 <a:solidFill>
                   <a:srgbClr val="9CA3AF"/>
                 </a:solidFill>
-                <a:latin typeface="Arial"/>
+                <a:latin typeface="Calibri"/>
               </a:rPr>
               <a:t>09.07.2026</a:t>
             </a:r>
@@ -6218,7 +6386,7 @@
       </p:sp>
       <p:sp>
         <p:nvSpPr>
-          <p:cNvPr id="23" name="!!tl_dot_8"/>
+          <p:cNvPr id="24" name="!!tl_dot_8"/>
           <p:cNvSpPr/>
           <p:nvPr/>
         </p:nvSpPr>
@@ -6262,7 +6430,7 @@
       </p:sp>
       <p:sp>
         <p:nvSpPr>
-          <p:cNvPr id="24" name="lbl_8_s1"/>
+          <p:cNvPr id="25" name="lbl_8_s1"/>
           <p:cNvSpPr txBox="1"/>
           <p:nvPr/>
         </p:nvSpPr>
@@ -6288,7 +6456,7 @@
                 <a:solidFill>
                   <a:srgbClr val="9CA3AF"/>
                 </a:solidFill>
-                <a:latin typeface="Arial"/>
+                <a:latin typeface="Calibri"/>
               </a:rPr>
               <a:t>16.07.2026</a:t>
             </a:r>
@@ -6297,7 +6465,7 @@
       </p:sp>
       <p:sp>
         <p:nvSpPr>
-          <p:cNvPr id="25" name="!!tl_dot_9"/>
+          <p:cNvPr id="26" name="!!tl_dot_9"/>
           <p:cNvSpPr/>
           <p:nvPr/>
         </p:nvSpPr>
@@ -6341,7 +6509,7 @@
       </p:sp>
       <p:sp>
         <p:nvSpPr>
-          <p:cNvPr id="26" name="lbl_9_s1"/>
+          <p:cNvPr id="27" name="lbl_9_s1"/>
           <p:cNvSpPr txBox="1"/>
           <p:nvPr/>
         </p:nvSpPr>
@@ -6367,7 +6535,7 @@
                 <a:solidFill>
                   <a:srgbClr val="9CA3AF"/>
                 </a:solidFill>
-                <a:latin typeface="Arial"/>
+                <a:latin typeface="Calibri"/>
               </a:rPr>
               <a:t>20.07.2026</a:t>
             </a:r>
@@ -6430,9 +6598,9 @@
             <a:r>
               <a:rPr sz="4200" b="1">
                 <a:solidFill>
-                  <a:srgbClr val="1F2023"/>
-                </a:solidFill>
-                <a:latin typeface="Arial"/>
+                  <a:srgbClr val="808080"/>
+                </a:solidFill>
+                <a:latin typeface="Calibri"/>
               </a:rPr>
               <a:t>FL-Trilemma: Project Timeline</a:t>
             </a:r>
@@ -6467,16 +6635,52 @@
                 <a:solidFill>
                   <a:srgbClr val="6B7280"/>
                 </a:solidFill>
-                <a:latin typeface="Arial"/>
+                <a:latin typeface="Calibri"/>
               </a:rPr>
               <a:t>From kick-off to final presentation</a:t>
             </a:r>
           </a:p>
         </p:txBody>
       </p:sp>
-      <p:sp>
-        <p:nvSpPr>
-          <p:cNvPr id="4" name="content_pill_m2"/>
+      <p:cxnSp>
+        <p:nvCxnSpPr>
+          <p:cNvPr id="4" name="divider_m2"/>
+          <p:cNvCxnSpPr/>
+          <p:nvPr/>
+        </p:nvCxnSpPr>
+        <p:spPr>
+          <a:xfrm>
+            <a:off x="1143000" y="1905000"/>
+            <a:ext cx="16002000" cy="0"/>
+          </a:xfrm>
+          <a:prstGeom prst="line">
+            <a:avLst/>
+          </a:prstGeom>
+          <a:ln w="19050">
+            <a:solidFill>
+              <a:srgbClr val="B3B3B3"/>
+            </a:solidFill>
+          </a:ln>
+          <a:effectLst/>
+        </p:spPr>
+        <p:style>
+          <a:lnRef idx="2">
+            <a:schemeClr val="accent1"/>
+          </a:lnRef>
+          <a:fillRef idx="0">
+            <a:schemeClr val="accent1"/>
+          </a:fillRef>
+          <a:effectRef idx="1">
+            <a:schemeClr val="accent1"/>
+          </a:effectRef>
+          <a:fontRef idx="minor">
+            <a:schemeClr val="tx1"/>
+          </a:fontRef>
+        </p:style>
+      </p:cxnSp>
+      <p:sp>
+        <p:nvSpPr>
+          <p:cNvPr id="5" name="content_pill_m2"/>
           <p:cNvSpPr/>
           <p:nvPr/>
         </p:nvSpPr>
@@ -6491,7 +6695,7 @@
             </a:avLst>
           </a:prstGeom>
           <a:solidFill>
-            <a:srgbClr val="EAF1FB"/>
+            <a:srgbClr val="C9E1FF"/>
           </a:solidFill>
           <a:ln>
             <a:noFill/>
@@ -6520,9 +6724,9 @@
             <a:r>
               <a:rPr sz="1800" b="1">
                 <a:solidFill>
-                  <a:srgbClr val="245C9E"/>
-                </a:solidFill>
-                <a:latin typeface="Arial"/>
+                  <a:srgbClr val="325786"/>
+                </a:solidFill>
+                <a:latin typeface="Calibri"/>
               </a:rPr>
               <a:t>30.04.2026</a:t>
             </a:r>
@@ -6531,7 +6735,7 @@
       </p:sp>
       <p:sp>
         <p:nvSpPr>
-          <p:cNvPr id="5" name="content_headline_m2"/>
+          <p:cNvPr id="6" name="content_headline_m2"/>
           <p:cNvSpPr txBox="1"/>
           <p:nvPr/>
         </p:nvSpPr>
@@ -6557,7 +6761,7 @@
                 <a:solidFill>
                   <a:srgbClr val="1F2023"/>
                 </a:solidFill>
-                <a:latin typeface="Arial"/>
+                <a:latin typeface="Calibri"/>
               </a:rPr>
               <a:t>Small Presentations on Potential Topics</a:t>
             </a:r>
@@ -6566,7 +6770,7 @@
       </p:sp>
       <p:sp>
         <p:nvSpPr>
-          <p:cNvPr id="6" name="content_bullets_m2"/>
+          <p:cNvPr id="7" name="content_bullets_m2"/>
           <p:cNvSpPr txBox="1"/>
           <p:nvPr/>
         </p:nvSpPr>
@@ -6594,18 +6798,18 @@
             <a:r>
               <a:rPr sz="2100" b="1">
                 <a:solidFill>
-                  <a:srgbClr val="245C9E"/>
-                </a:solidFill>
-                <a:latin typeface="Arial"/>
+                  <a:srgbClr val="C1212A"/>
+                </a:solidFill>
+                <a:latin typeface="Calibri"/>
               </a:rPr>
               <a:t>-  </a:t>
             </a:r>
             <a:r>
               <a:rPr sz="2100">
                 <a:solidFill>
-                  <a:srgbClr val="4B5563"/>
-                </a:solidFill>
-                <a:latin typeface="Arial"/>
+                  <a:srgbClr val="325786"/>
+                </a:solidFill>
+                <a:latin typeface="Calibri"/>
               </a:rPr>
               <a:t>DFL.tex - Security and Privacy Concerns in Federated Learning: An Introduction</a:t>
             </a:r>
@@ -6619,18 +6823,18 @@
             <a:r>
               <a:rPr sz="2100" b="1">
                 <a:solidFill>
-                  <a:srgbClr val="245C9E"/>
-                </a:solidFill>
-                <a:latin typeface="Arial"/>
+                  <a:srgbClr val="C1212A"/>
+                </a:solidFill>
+                <a:latin typeface="Calibri"/>
               </a:rPr>
               <a:t>-  </a:t>
             </a:r>
             <a:r>
               <a:rPr sz="2100">
                 <a:solidFill>
-                  <a:srgbClr val="4B5563"/>
-                </a:solidFill>
-                <a:latin typeface="Arial"/>
+                  <a:srgbClr val="325786"/>
+                </a:solidFill>
+                <a:latin typeface="Calibri"/>
               </a:rPr>
               <a:t>SMPC.tex - Introduction to Secure Multi-Party Computation</a:t>
             </a:r>
@@ -6639,7 +6843,7 @@
       </p:sp>
       <p:sp>
         <p:nvSpPr>
-          <p:cNvPr id="7" name="!!tl_track"/>
+          <p:cNvPr id="8" name="!!tl_track"/>
           <p:cNvSpPr/>
           <p:nvPr/>
         </p:nvSpPr>
@@ -6685,7 +6889,7 @@
       </p:sp>
       <p:sp>
         <p:nvSpPr>
-          <p:cNvPr id="8" name="!!tl_fill"/>
+          <p:cNvPr id="9" name="!!tl_fill"/>
           <p:cNvSpPr/>
           <p:nvPr/>
         </p:nvSpPr>
@@ -6700,7 +6904,7 @@
             </a:avLst>
           </a:prstGeom>
           <a:solidFill>
-            <a:srgbClr val="245C9E"/>
+            <a:srgbClr val="325786"/>
           </a:solidFill>
           <a:ln>
             <a:noFill/>
@@ -6731,7 +6935,7 @@
       </p:sp>
       <p:sp>
         <p:nvSpPr>
-          <p:cNvPr id="9" name="!!tl_dot_1"/>
+          <p:cNvPr id="10" name="!!tl_dot_1"/>
           <p:cNvSpPr/>
           <p:nvPr/>
         </p:nvSpPr>
@@ -6775,7 +6979,7 @@
       </p:sp>
       <p:sp>
         <p:nvSpPr>
-          <p:cNvPr id="10" name="lbl_1_s2"/>
+          <p:cNvPr id="11" name="lbl_1_s2"/>
           <p:cNvSpPr txBox="1"/>
           <p:nvPr/>
         </p:nvSpPr>
@@ -6801,7 +7005,7 @@
                 <a:solidFill>
                   <a:srgbClr val="9CA3AF"/>
                 </a:solidFill>
-                <a:latin typeface="Arial"/>
+                <a:latin typeface="Calibri"/>
               </a:rPr>
               <a:t>09.04.2026</a:t>
             </a:r>
@@ -6810,7 +7014,7 @@
       </p:sp>
       <p:sp>
         <p:nvSpPr>
-          <p:cNvPr id="11" name="!!tl_dot_2"/>
+          <p:cNvPr id="12" name="!!tl_dot_2"/>
           <p:cNvSpPr/>
           <p:nvPr/>
         </p:nvSpPr>
@@ -6854,7 +7058,7 @@
       </p:sp>
       <p:sp>
         <p:nvSpPr>
-          <p:cNvPr id="12" name="lbl_2_s2"/>
+          <p:cNvPr id="13" name="lbl_2_s2"/>
           <p:cNvSpPr txBox="1"/>
           <p:nvPr/>
         </p:nvSpPr>
@@ -6880,7 +7084,7 @@
                 <a:solidFill>
                   <a:srgbClr val="9CA3AF"/>
                 </a:solidFill>
-                <a:latin typeface="Arial"/>
+                <a:latin typeface="Calibri"/>
               </a:rPr>
               <a:t>16.04.2026</a:t>
             </a:r>
@@ -6889,7 +7093,7 @@
       </p:sp>
       <p:sp>
         <p:nvSpPr>
-          <p:cNvPr id="13" name="!!tl_dot_3"/>
+          <p:cNvPr id="14" name="!!tl_dot_3"/>
           <p:cNvSpPr/>
           <p:nvPr/>
         </p:nvSpPr>
@@ -6902,7 +7106,7 @@
             <a:avLst/>
           </a:prstGeom>
           <a:solidFill>
-            <a:srgbClr val="245C9E"/>
+            <a:srgbClr val="325786"/>
           </a:solidFill>
           <a:ln>
             <a:noFill/>
@@ -6933,7 +7137,7 @@
       </p:sp>
       <p:sp>
         <p:nvSpPr>
-          <p:cNvPr id="14" name="lbl_3_s2"/>
+          <p:cNvPr id="15" name="lbl_3_s2"/>
           <p:cNvSpPr txBox="1"/>
           <p:nvPr/>
         </p:nvSpPr>
@@ -6959,7 +7163,7 @@
                 <a:solidFill>
                   <a:srgbClr val="1F2023"/>
                 </a:solidFill>
-                <a:latin typeface="Arial"/>
+                <a:latin typeface="Calibri"/>
               </a:rPr>
               <a:t>30.04.2026</a:t>
             </a:r>
@@ -6968,7 +7172,7 @@
       </p:sp>
       <p:sp>
         <p:nvSpPr>
-          <p:cNvPr id="15" name="!!tl_dot_4"/>
+          <p:cNvPr id="16" name="!!tl_dot_4"/>
           <p:cNvSpPr/>
           <p:nvPr/>
         </p:nvSpPr>
@@ -7012,7 +7216,7 @@
       </p:sp>
       <p:sp>
         <p:nvSpPr>
-          <p:cNvPr id="16" name="lbl_4_s2"/>
+          <p:cNvPr id="17" name="lbl_4_s2"/>
           <p:cNvSpPr txBox="1"/>
           <p:nvPr/>
         </p:nvSpPr>
@@ -7038,7 +7242,7 @@
                 <a:solidFill>
                   <a:srgbClr val="9CA3AF"/>
                 </a:solidFill>
-                <a:latin typeface="Arial"/>
+                <a:latin typeface="Calibri"/>
               </a:rPr>
               <a:t>~21.05.2026</a:t>
             </a:r>
@@ -7047,7 +7251,7 @@
       </p:sp>
       <p:sp>
         <p:nvSpPr>
-          <p:cNvPr id="17" name="!!tl_dot_5"/>
+          <p:cNvPr id="18" name="!!tl_dot_5"/>
           <p:cNvSpPr/>
           <p:nvPr/>
         </p:nvSpPr>
@@ -7091,7 +7295,7 @@
       </p:sp>
       <p:sp>
         <p:nvSpPr>
-          <p:cNvPr id="18" name="lbl_5_s2"/>
+          <p:cNvPr id="19" name="lbl_5_s2"/>
           <p:cNvSpPr txBox="1"/>
           <p:nvPr/>
         </p:nvSpPr>
@@ -7117,7 +7321,7 @@
                 <a:solidFill>
                   <a:srgbClr val="9CA3AF"/>
                 </a:solidFill>
-                <a:latin typeface="Arial"/>
+                <a:latin typeface="Calibri"/>
               </a:rPr>
               <a:t>18.06.2026</a:t>
             </a:r>
@@ -7126,7 +7330,7 @@
       </p:sp>
       <p:sp>
         <p:nvSpPr>
-          <p:cNvPr id="19" name="!!tl_dot_6"/>
+          <p:cNvPr id="20" name="!!tl_dot_6"/>
           <p:cNvSpPr/>
           <p:nvPr/>
         </p:nvSpPr>
@@ -7170,7 +7374,7 @@
       </p:sp>
       <p:sp>
         <p:nvSpPr>
-          <p:cNvPr id="20" name="lbl_6_s2"/>
+          <p:cNvPr id="21" name="lbl_6_s2"/>
           <p:cNvSpPr txBox="1"/>
           <p:nvPr/>
         </p:nvSpPr>
@@ -7196,7 +7400,7 @@
                 <a:solidFill>
                   <a:srgbClr val="9CA3AF"/>
                 </a:solidFill>
-                <a:latin typeface="Arial"/>
+                <a:latin typeface="Calibri"/>
               </a:rPr>
               <a:t>25.06.2026</a:t>
             </a:r>
@@ -7205,7 +7409,7 @@
       </p:sp>
       <p:sp>
         <p:nvSpPr>
-          <p:cNvPr id="21" name="!!tl_dot_7"/>
+          <p:cNvPr id="22" name="!!tl_dot_7"/>
           <p:cNvSpPr/>
           <p:nvPr/>
         </p:nvSpPr>
@@ -7249,7 +7453,7 @@
       </p:sp>
       <p:sp>
         <p:nvSpPr>
-          <p:cNvPr id="22" name="lbl_7_s2"/>
+          <p:cNvPr id="23" name="lbl_7_s2"/>
           <p:cNvSpPr txBox="1"/>
           <p:nvPr/>
         </p:nvSpPr>
@@ -7275,7 +7479,7 @@
                 <a:solidFill>
                   <a:srgbClr val="9CA3AF"/>
                 </a:solidFill>
-                <a:latin typeface="Arial"/>
+                <a:latin typeface="Calibri"/>
               </a:rPr>
               <a:t>09.07.2026</a:t>
             </a:r>
@@ -7284,7 +7488,7 @@
       </p:sp>
       <p:sp>
         <p:nvSpPr>
-          <p:cNvPr id="23" name="!!tl_dot_8"/>
+          <p:cNvPr id="24" name="!!tl_dot_8"/>
           <p:cNvSpPr/>
           <p:nvPr/>
         </p:nvSpPr>
@@ -7328,7 +7532,7 @@
       </p:sp>
       <p:sp>
         <p:nvSpPr>
-          <p:cNvPr id="24" name="lbl_8_s2"/>
+          <p:cNvPr id="25" name="lbl_8_s2"/>
           <p:cNvSpPr txBox="1"/>
           <p:nvPr/>
         </p:nvSpPr>
@@ -7354,7 +7558,7 @@
                 <a:solidFill>
                   <a:srgbClr val="9CA3AF"/>
                 </a:solidFill>
-                <a:latin typeface="Arial"/>
+                <a:latin typeface="Calibri"/>
               </a:rPr>
               <a:t>16.07.2026</a:t>
             </a:r>
@@ -7363,7 +7567,7 @@
       </p:sp>
       <p:sp>
         <p:nvSpPr>
-          <p:cNvPr id="25" name="!!tl_dot_9"/>
+          <p:cNvPr id="26" name="!!tl_dot_9"/>
           <p:cNvSpPr/>
           <p:nvPr/>
         </p:nvSpPr>
@@ -7407,7 +7611,7 @@
       </p:sp>
       <p:sp>
         <p:nvSpPr>
-          <p:cNvPr id="26" name="lbl_9_s2"/>
+          <p:cNvPr id="27" name="lbl_9_s2"/>
           <p:cNvSpPr txBox="1"/>
           <p:nvPr/>
         </p:nvSpPr>
@@ -7433,7 +7637,7 @@
                 <a:solidFill>
                   <a:srgbClr val="9CA3AF"/>
                 </a:solidFill>
-                <a:latin typeface="Arial"/>
+                <a:latin typeface="Calibri"/>
               </a:rPr>
               <a:t>20.07.2026</a:t>
             </a:r>
@@ -7496,9 +7700,9 @@
             <a:r>
               <a:rPr sz="4200" b="1">
                 <a:solidFill>
-                  <a:srgbClr val="1F2023"/>
-                </a:solidFill>
-                <a:latin typeface="Arial"/>
+                  <a:srgbClr val="808080"/>
+                </a:solidFill>
+                <a:latin typeface="Calibri"/>
               </a:rPr>
               <a:t>FL-Trilemma: Project Timeline</a:t>
             </a:r>
@@ -7533,16 +7737,52 @@
                 <a:solidFill>
                   <a:srgbClr val="6B7280"/>
                 </a:solidFill>
-                <a:latin typeface="Arial"/>
+                <a:latin typeface="Calibri"/>
               </a:rPr>
               <a:t>From kick-off to final presentation</a:t>
             </a:r>
           </a:p>
         </p:txBody>
       </p:sp>
-      <p:sp>
-        <p:nvSpPr>
-          <p:cNvPr id="4" name="content_pill_m3"/>
+      <p:cxnSp>
+        <p:nvCxnSpPr>
+          <p:cNvPr id="4" name="divider_m3"/>
+          <p:cNvCxnSpPr/>
+          <p:nvPr/>
+        </p:nvCxnSpPr>
+        <p:spPr>
+          <a:xfrm>
+            <a:off x="1143000" y="1905000"/>
+            <a:ext cx="16002000" cy="0"/>
+          </a:xfrm>
+          <a:prstGeom prst="line">
+            <a:avLst/>
+          </a:prstGeom>
+          <a:ln w="19050">
+            <a:solidFill>
+              <a:srgbClr val="B3B3B3"/>
+            </a:solidFill>
+          </a:ln>
+          <a:effectLst/>
+        </p:spPr>
+        <p:style>
+          <a:lnRef idx="2">
+            <a:schemeClr val="accent1"/>
+          </a:lnRef>
+          <a:fillRef idx="0">
+            <a:schemeClr val="accent1"/>
+          </a:fillRef>
+          <a:effectRef idx="1">
+            <a:schemeClr val="accent1"/>
+          </a:effectRef>
+          <a:fontRef idx="minor">
+            <a:schemeClr val="tx1"/>
+          </a:fontRef>
+        </p:style>
+      </p:cxnSp>
+      <p:sp>
+        <p:nvSpPr>
+          <p:cNvPr id="5" name="content_pill_m3"/>
           <p:cNvSpPr/>
           <p:nvPr/>
         </p:nvSpPr>
@@ -7557,7 +7797,7 @@
             </a:avLst>
           </a:prstGeom>
           <a:solidFill>
-            <a:srgbClr val="EAF1FB"/>
+            <a:srgbClr val="C9E1FF"/>
           </a:solidFill>
           <a:ln>
             <a:noFill/>
@@ -7586,9 +7826,9 @@
             <a:r>
               <a:rPr sz="1800" b="1">
                 <a:solidFill>
-                  <a:srgbClr val="245C9E"/>
-                </a:solidFill>
-                <a:latin typeface="Arial"/>
+                  <a:srgbClr val="325786"/>
+                </a:solidFill>
+                <a:latin typeface="Calibri"/>
               </a:rPr>
               <a:t>~21.05.2026</a:t>
             </a:r>
@@ -7597,7 +7837,7 @@
       </p:sp>
       <p:sp>
         <p:nvSpPr>
-          <p:cNvPr id="5" name="content_headline_m3"/>
+          <p:cNvPr id="6" name="content_headline_m3"/>
           <p:cNvSpPr txBox="1"/>
           <p:nvPr/>
         </p:nvSpPr>
@@ -7623,7 +7863,7 @@
                 <a:solidFill>
                   <a:srgbClr val="1F2023"/>
                 </a:solidFill>
-                <a:latin typeface="Arial"/>
+                <a:latin typeface="Calibri"/>
               </a:rPr>
               <a:t>Lock-in: FL Trilemma</a:t>
             </a:r>
@@ -7632,7 +7872,7 @@
       </p:sp>
       <p:sp>
         <p:nvSpPr>
-          <p:cNvPr id="6" name="content_bullets_m3"/>
+          <p:cNvPr id="7" name="content_bullets_m3"/>
           <p:cNvSpPr txBox="1"/>
           <p:nvPr/>
         </p:nvSpPr>
@@ -7660,18 +7900,18 @@
             <a:r>
               <a:rPr sz="2100" b="1">
                 <a:solidFill>
-                  <a:srgbClr val="245C9E"/>
-                </a:solidFill>
-                <a:latin typeface="Arial"/>
+                  <a:srgbClr val="C1212A"/>
+                </a:solidFill>
+                <a:latin typeface="Calibri"/>
               </a:rPr>
               <a:t>-  </a:t>
             </a:r>
             <a:r>
               <a:rPr sz="2100">
                 <a:solidFill>
-                  <a:srgbClr val="4B5563"/>
-                </a:solidFill>
-                <a:latin typeface="Arial"/>
+                  <a:srgbClr val="325786"/>
+                </a:solidFill>
+                <a:latin typeface="Calibri"/>
               </a:rPr>
               <a:t>Theoretical understanding of the problem space</a:t>
             </a:r>
@@ -7685,18 +7925,18 @@
             <a:r>
               <a:rPr sz="2100" b="1">
                 <a:solidFill>
-                  <a:srgbClr val="245C9E"/>
-                </a:solidFill>
-                <a:latin typeface="Arial"/>
+                  <a:srgbClr val="C1212A"/>
+                </a:solidFill>
+                <a:latin typeface="Calibri"/>
               </a:rPr>
               <a:t>-  </a:t>
             </a:r>
             <a:r>
               <a:rPr sz="2100">
                 <a:solidFill>
-                  <a:srgbClr val="4B5563"/>
-                </a:solidFill>
-                <a:latin typeface="Arial"/>
+                  <a:srgbClr val="325786"/>
+                </a:solidFill>
+                <a:latin typeface="Calibri"/>
               </a:rPr>
               <a:t>Robust aggregation landscape reviewed: FLTrust, Krum, Trimmed Mean</a:t>
             </a:r>
@@ -7705,7 +7945,7 @@
       </p:sp>
       <p:sp>
         <p:nvSpPr>
-          <p:cNvPr id="7" name="!!tl_track"/>
+          <p:cNvPr id="8" name="!!tl_track"/>
           <p:cNvSpPr/>
           <p:nvPr/>
         </p:nvSpPr>
@@ -7751,7 +7991,7 @@
       </p:sp>
       <p:sp>
         <p:nvSpPr>
-          <p:cNvPr id="8" name="!!tl_fill"/>
+          <p:cNvPr id="9" name="!!tl_fill"/>
           <p:cNvSpPr/>
           <p:nvPr/>
         </p:nvSpPr>
@@ -7766,7 +8006,7 @@
             </a:avLst>
           </a:prstGeom>
           <a:solidFill>
-            <a:srgbClr val="245C9E"/>
+            <a:srgbClr val="325786"/>
           </a:solidFill>
           <a:ln>
             <a:noFill/>
@@ -7797,7 +8037,7 @@
       </p:sp>
       <p:sp>
         <p:nvSpPr>
-          <p:cNvPr id="9" name="!!tl_dot_1"/>
+          <p:cNvPr id="10" name="!!tl_dot_1"/>
           <p:cNvSpPr/>
           <p:nvPr/>
         </p:nvSpPr>
@@ -7841,7 +8081,7 @@
       </p:sp>
       <p:sp>
         <p:nvSpPr>
-          <p:cNvPr id="10" name="lbl_1_s3"/>
+          <p:cNvPr id="11" name="lbl_1_s3"/>
           <p:cNvSpPr txBox="1"/>
           <p:nvPr/>
         </p:nvSpPr>
@@ -7867,7 +8107,7 @@
                 <a:solidFill>
                   <a:srgbClr val="9CA3AF"/>
                 </a:solidFill>
-                <a:latin typeface="Arial"/>
+                <a:latin typeface="Calibri"/>
               </a:rPr>
               <a:t>09.04.2026</a:t>
             </a:r>
@@ -7876,7 +8116,7 @@
       </p:sp>
       <p:sp>
         <p:nvSpPr>
-          <p:cNvPr id="11" name="!!tl_dot_2"/>
+          <p:cNvPr id="12" name="!!tl_dot_2"/>
           <p:cNvSpPr/>
           <p:nvPr/>
         </p:nvSpPr>
@@ -7920,7 +8160,7 @@
       </p:sp>
       <p:sp>
         <p:nvSpPr>
-          <p:cNvPr id="12" name="lbl_2_s3"/>
+          <p:cNvPr id="13" name="lbl_2_s3"/>
           <p:cNvSpPr txBox="1"/>
           <p:nvPr/>
         </p:nvSpPr>
@@ -7946,7 +8186,7 @@
                 <a:solidFill>
                   <a:srgbClr val="9CA3AF"/>
                 </a:solidFill>
-                <a:latin typeface="Arial"/>
+                <a:latin typeface="Calibri"/>
               </a:rPr>
               <a:t>16.04.2026</a:t>
             </a:r>
@@ -7955,7 +8195,7 @@
       </p:sp>
       <p:sp>
         <p:nvSpPr>
-          <p:cNvPr id="13" name="!!tl_dot_3"/>
+          <p:cNvPr id="14" name="!!tl_dot_3"/>
           <p:cNvSpPr/>
           <p:nvPr/>
         </p:nvSpPr>
@@ -7999,7 +8239,7 @@
       </p:sp>
       <p:sp>
         <p:nvSpPr>
-          <p:cNvPr id="14" name="lbl_3_s3"/>
+          <p:cNvPr id="15" name="lbl_3_s3"/>
           <p:cNvSpPr txBox="1"/>
           <p:nvPr/>
         </p:nvSpPr>
@@ -8025,7 +8265,7 @@
                 <a:solidFill>
                   <a:srgbClr val="9CA3AF"/>
                 </a:solidFill>
-                <a:latin typeface="Arial"/>
+                <a:latin typeface="Calibri"/>
               </a:rPr>
               <a:t>30.04.2026</a:t>
             </a:r>
@@ -8034,7 +8274,7 @@
       </p:sp>
       <p:sp>
         <p:nvSpPr>
-          <p:cNvPr id="15" name="!!tl_dot_4"/>
+          <p:cNvPr id="16" name="!!tl_dot_4"/>
           <p:cNvSpPr/>
           <p:nvPr/>
         </p:nvSpPr>
@@ -8047,7 +8287,7 @@
             <a:avLst/>
           </a:prstGeom>
           <a:solidFill>
-            <a:srgbClr val="245C9E"/>
+            <a:srgbClr val="325786"/>
           </a:solidFill>
           <a:ln>
             <a:noFill/>
@@ -8078,7 +8318,7 @@
       </p:sp>
       <p:sp>
         <p:nvSpPr>
-          <p:cNvPr id="16" name="lbl_4_s3"/>
+          <p:cNvPr id="17" name="lbl_4_s3"/>
           <p:cNvSpPr txBox="1"/>
           <p:nvPr/>
         </p:nvSpPr>
@@ -8104,7 +8344,7 @@
                 <a:solidFill>
                   <a:srgbClr val="1F2023"/>
                 </a:solidFill>
-                <a:latin typeface="Arial"/>
+                <a:latin typeface="Calibri"/>
               </a:rPr>
               <a:t>~21.05.2026</a:t>
             </a:r>
@@ -8113,7 +8353,7 @@
       </p:sp>
       <p:sp>
         <p:nvSpPr>
-          <p:cNvPr id="17" name="!!tl_dot_5"/>
+          <p:cNvPr id="18" name="!!tl_dot_5"/>
           <p:cNvSpPr/>
           <p:nvPr/>
         </p:nvSpPr>
@@ -8157,7 +8397,7 @@
       </p:sp>
       <p:sp>
         <p:nvSpPr>
-          <p:cNvPr id="18" name="lbl_5_s3"/>
+          <p:cNvPr id="19" name="lbl_5_s3"/>
           <p:cNvSpPr txBox="1"/>
           <p:nvPr/>
         </p:nvSpPr>
@@ -8183,7 +8423,7 @@
                 <a:solidFill>
                   <a:srgbClr val="9CA3AF"/>
                 </a:solidFill>
-                <a:latin typeface="Arial"/>
+                <a:latin typeface="Calibri"/>
               </a:rPr>
               <a:t>18.06.2026</a:t>
             </a:r>
@@ -8192,7 +8432,7 @@
       </p:sp>
       <p:sp>
         <p:nvSpPr>
-          <p:cNvPr id="19" name="!!tl_dot_6"/>
+          <p:cNvPr id="20" name="!!tl_dot_6"/>
           <p:cNvSpPr/>
           <p:nvPr/>
         </p:nvSpPr>
@@ -8236,7 +8476,7 @@
       </p:sp>
       <p:sp>
         <p:nvSpPr>
-          <p:cNvPr id="20" name="lbl_6_s3"/>
+          <p:cNvPr id="21" name="lbl_6_s3"/>
           <p:cNvSpPr txBox="1"/>
           <p:nvPr/>
         </p:nvSpPr>
@@ -8262,7 +8502,7 @@
                 <a:solidFill>
                   <a:srgbClr val="9CA3AF"/>
                 </a:solidFill>
-                <a:latin typeface="Arial"/>
+                <a:latin typeface="Calibri"/>
               </a:rPr>
               <a:t>25.06.2026</a:t>
             </a:r>
@@ -8271,7 +8511,7 @@
       </p:sp>
       <p:sp>
         <p:nvSpPr>
-          <p:cNvPr id="21" name="!!tl_dot_7"/>
+          <p:cNvPr id="22" name="!!tl_dot_7"/>
           <p:cNvSpPr/>
           <p:nvPr/>
         </p:nvSpPr>
@@ -8315,7 +8555,7 @@
       </p:sp>
       <p:sp>
         <p:nvSpPr>
-          <p:cNvPr id="22" name="lbl_7_s3"/>
+          <p:cNvPr id="23" name="lbl_7_s3"/>
           <p:cNvSpPr txBox="1"/>
           <p:nvPr/>
         </p:nvSpPr>
@@ -8341,7 +8581,7 @@
                 <a:solidFill>
                   <a:srgbClr val="9CA3AF"/>
                 </a:solidFill>
-                <a:latin typeface="Arial"/>
+                <a:latin typeface="Calibri"/>
               </a:rPr>
               <a:t>09.07.2026</a:t>
             </a:r>
@@ -8350,7 +8590,7 @@
       </p:sp>
       <p:sp>
         <p:nvSpPr>
-          <p:cNvPr id="23" name="!!tl_dot_8"/>
+          <p:cNvPr id="24" name="!!tl_dot_8"/>
           <p:cNvSpPr/>
           <p:nvPr/>
         </p:nvSpPr>
@@ -8394,7 +8634,7 @@
       </p:sp>
       <p:sp>
         <p:nvSpPr>
-          <p:cNvPr id="24" name="lbl_8_s3"/>
+          <p:cNvPr id="25" name="lbl_8_s3"/>
           <p:cNvSpPr txBox="1"/>
           <p:nvPr/>
         </p:nvSpPr>
@@ -8420,7 +8660,7 @@
                 <a:solidFill>
                   <a:srgbClr val="9CA3AF"/>
                 </a:solidFill>
-                <a:latin typeface="Arial"/>
+                <a:latin typeface="Calibri"/>
               </a:rPr>
               <a:t>16.07.2026</a:t>
             </a:r>
@@ -8429,7 +8669,7 @@
       </p:sp>
       <p:sp>
         <p:nvSpPr>
-          <p:cNvPr id="25" name="!!tl_dot_9"/>
+          <p:cNvPr id="26" name="!!tl_dot_9"/>
           <p:cNvSpPr/>
           <p:nvPr/>
         </p:nvSpPr>
@@ -8473,7 +8713,7 @@
       </p:sp>
       <p:sp>
         <p:nvSpPr>
-          <p:cNvPr id="26" name="lbl_9_s3"/>
+          <p:cNvPr id="27" name="lbl_9_s3"/>
           <p:cNvSpPr txBox="1"/>
           <p:nvPr/>
         </p:nvSpPr>
@@ -8499,7 +8739,7 @@
                 <a:solidFill>
                   <a:srgbClr val="9CA3AF"/>
                 </a:solidFill>
-                <a:latin typeface="Arial"/>
+                <a:latin typeface="Calibri"/>
               </a:rPr>
               <a:t>20.07.2026</a:t>
             </a:r>
@@ -8562,9 +8802,9 @@
             <a:r>
               <a:rPr sz="4200" b="1">
                 <a:solidFill>
-                  <a:srgbClr val="1F2023"/>
-                </a:solidFill>
-                <a:latin typeface="Arial"/>
+                  <a:srgbClr val="808080"/>
+                </a:solidFill>
+                <a:latin typeface="Calibri"/>
               </a:rPr>
               <a:t>FL-Trilemma: Project Timeline</a:t>
             </a:r>
@@ -8599,16 +8839,52 @@
                 <a:solidFill>
                   <a:srgbClr val="6B7280"/>
                 </a:solidFill>
-                <a:latin typeface="Arial"/>
+                <a:latin typeface="Calibri"/>
               </a:rPr>
               <a:t>From kick-off to final presentation</a:t>
             </a:r>
           </a:p>
         </p:txBody>
       </p:sp>
-      <p:sp>
-        <p:nvSpPr>
-          <p:cNvPr id="4" name="content_placeholder_m4"/>
+      <p:cxnSp>
+        <p:nvCxnSpPr>
+          <p:cNvPr id="4" name="divider_m4"/>
+          <p:cNvCxnSpPr/>
+          <p:nvPr/>
+        </p:nvCxnSpPr>
+        <p:spPr>
+          <a:xfrm>
+            <a:off x="1143000" y="1905000"/>
+            <a:ext cx="16002000" cy="0"/>
+          </a:xfrm>
+          <a:prstGeom prst="line">
+            <a:avLst/>
+          </a:prstGeom>
+          <a:ln w="19050">
+            <a:solidFill>
+              <a:srgbClr val="B3B3B3"/>
+            </a:solidFill>
+          </a:ln>
+          <a:effectLst/>
+        </p:spPr>
+        <p:style>
+          <a:lnRef idx="2">
+            <a:schemeClr val="accent1"/>
+          </a:lnRef>
+          <a:fillRef idx="0">
+            <a:schemeClr val="accent1"/>
+          </a:fillRef>
+          <a:effectRef idx="1">
+            <a:schemeClr val="accent1"/>
+          </a:effectRef>
+          <a:fontRef idx="minor">
+            <a:schemeClr val="tx1"/>
+          </a:fontRef>
+        </p:style>
+      </p:cxnSp>
+      <p:sp>
+        <p:nvSpPr>
+          <p:cNvPr id="5" name="content_placeholder_m4"/>
           <p:cNvSpPr/>
           <p:nvPr/>
         </p:nvSpPr>
@@ -8666,7 +8942,7 @@
       </p:sp>
       <p:sp>
         <p:nvSpPr>
-          <p:cNvPr id="5" name="content_pill_m4"/>
+          <p:cNvPr id="6" name="content_pill_m4"/>
           <p:cNvSpPr/>
           <p:nvPr/>
         </p:nvSpPr>
@@ -8681,7 +8957,7 @@
             </a:avLst>
           </a:prstGeom>
           <a:solidFill>
-            <a:srgbClr val="EAF1FB"/>
+            <a:srgbClr val="C9E1FF"/>
           </a:solidFill>
           <a:ln>
             <a:noFill/>
@@ -8710,9 +8986,9 @@
             <a:r>
               <a:rPr sz="1800" b="1">
                 <a:solidFill>
-                  <a:srgbClr val="245C9E"/>
-                </a:solidFill>
-                <a:latin typeface="Arial"/>
+                  <a:srgbClr val="325786"/>
+                </a:solidFill>
+                <a:latin typeface="Calibri"/>
               </a:rPr>
               <a:t>18.06.2026</a:t>
             </a:r>
@@ -8721,7 +8997,7 @@
       </p:sp>
       <p:sp>
         <p:nvSpPr>
-          <p:cNvPr id="6" name="content_headline_m4"/>
+          <p:cNvPr id="7" name="content_headline_m4"/>
           <p:cNvSpPr txBox="1"/>
           <p:nvPr/>
         </p:nvSpPr>
@@ -8747,7 +9023,7 @@
                 <a:solidFill>
                   <a:srgbClr val="1F2023"/>
                 </a:solidFill>
-                <a:latin typeface="Arial"/>
+                <a:latin typeface="Calibri"/>
               </a:rPr>
               <a:t>Interim Presentation 1</a:t>
             </a:r>
@@ -8756,7 +9032,7 @@
       </p:sp>
       <p:sp>
         <p:nvSpPr>
-          <p:cNvPr id="7" name="content_bullets_m4"/>
+          <p:cNvPr id="8" name="content_bullets_m4"/>
           <p:cNvSpPr txBox="1"/>
           <p:nvPr/>
         </p:nvSpPr>
@@ -8784,18 +9060,18 @@
             <a:r>
               <a:rPr sz="1950" b="1">
                 <a:solidFill>
-                  <a:srgbClr val="245C9E"/>
-                </a:solidFill>
-                <a:latin typeface="Arial"/>
+                  <a:srgbClr val="C1212A"/>
+                </a:solidFill>
+                <a:latin typeface="Calibri"/>
               </a:rPr>
               <a:t>-  </a:t>
             </a:r>
             <a:r>
               <a:rPr sz="1950">
                 <a:solidFill>
-                  <a:srgbClr val="4B5563"/>
-                </a:solidFill>
-                <a:latin typeface="Arial"/>
+                  <a:srgbClr val="325786"/>
+                </a:solidFill>
+                <a:latin typeface="Calibri"/>
               </a:rPr>
               <a:t>First code foundation building up (MNIST, Flower)</a:t>
             </a:r>
@@ -8804,7 +9080,7 @@
       </p:sp>
       <p:sp>
         <p:nvSpPr>
-          <p:cNvPr id="8" name="!!tl_track"/>
+          <p:cNvPr id="9" name="!!tl_track"/>
           <p:cNvSpPr/>
           <p:nvPr/>
         </p:nvSpPr>
@@ -8850,7 +9126,7 @@
       </p:sp>
       <p:sp>
         <p:nvSpPr>
-          <p:cNvPr id="9" name="!!tl_fill"/>
+          <p:cNvPr id="10" name="!!tl_fill"/>
           <p:cNvSpPr/>
           <p:nvPr/>
         </p:nvSpPr>
@@ -8865,7 +9141,7 @@
             </a:avLst>
           </a:prstGeom>
           <a:solidFill>
-            <a:srgbClr val="245C9E"/>
+            <a:srgbClr val="325786"/>
           </a:solidFill>
           <a:ln>
             <a:noFill/>
@@ -8896,7 +9172,7 @@
       </p:sp>
       <p:sp>
         <p:nvSpPr>
-          <p:cNvPr id="10" name="!!tl_dot_1"/>
+          <p:cNvPr id="11" name="!!tl_dot_1"/>
           <p:cNvSpPr/>
           <p:nvPr/>
         </p:nvSpPr>
@@ -8940,7 +9216,7 @@
       </p:sp>
       <p:sp>
         <p:nvSpPr>
-          <p:cNvPr id="11" name="lbl_1_s4"/>
+          <p:cNvPr id="12" name="lbl_1_s4"/>
           <p:cNvSpPr txBox="1"/>
           <p:nvPr/>
         </p:nvSpPr>
@@ -8966,7 +9242,7 @@
                 <a:solidFill>
                   <a:srgbClr val="9CA3AF"/>
                 </a:solidFill>
-                <a:latin typeface="Arial"/>
+                <a:latin typeface="Calibri"/>
               </a:rPr>
               <a:t>09.04.2026</a:t>
             </a:r>
@@ -8975,7 +9251,7 @@
       </p:sp>
       <p:sp>
         <p:nvSpPr>
-          <p:cNvPr id="12" name="!!tl_dot_2"/>
+          <p:cNvPr id="13" name="!!tl_dot_2"/>
           <p:cNvSpPr/>
           <p:nvPr/>
         </p:nvSpPr>
@@ -9019,7 +9295,7 @@
       </p:sp>
       <p:sp>
         <p:nvSpPr>
-          <p:cNvPr id="13" name="lbl_2_s4"/>
+          <p:cNvPr id="14" name="lbl_2_s4"/>
           <p:cNvSpPr txBox="1"/>
           <p:nvPr/>
         </p:nvSpPr>
@@ -9045,7 +9321,7 @@
                 <a:solidFill>
                   <a:srgbClr val="9CA3AF"/>
                 </a:solidFill>
-                <a:latin typeface="Arial"/>
+                <a:latin typeface="Calibri"/>
               </a:rPr>
               <a:t>16.04.2026</a:t>
             </a:r>
@@ -9054,7 +9330,7 @@
       </p:sp>
       <p:sp>
         <p:nvSpPr>
-          <p:cNvPr id="14" name="!!tl_dot_3"/>
+          <p:cNvPr id="15" name="!!tl_dot_3"/>
           <p:cNvSpPr/>
           <p:nvPr/>
         </p:nvSpPr>
@@ -9098,7 +9374,7 @@
       </p:sp>
       <p:sp>
         <p:nvSpPr>
-          <p:cNvPr id="15" name="lbl_3_s4"/>
+          <p:cNvPr id="16" name="lbl_3_s4"/>
           <p:cNvSpPr txBox="1"/>
           <p:nvPr/>
         </p:nvSpPr>
@@ -9124,7 +9400,7 @@
                 <a:solidFill>
                   <a:srgbClr val="9CA3AF"/>
                 </a:solidFill>
-                <a:latin typeface="Arial"/>
+                <a:latin typeface="Calibri"/>
               </a:rPr>
               <a:t>30.04.2026</a:t>
             </a:r>
@@ -9133,7 +9409,7 @@
       </p:sp>
       <p:sp>
         <p:nvSpPr>
-          <p:cNvPr id="16" name="!!tl_dot_4"/>
+          <p:cNvPr id="17" name="!!tl_dot_4"/>
           <p:cNvSpPr/>
           <p:nvPr/>
         </p:nvSpPr>
@@ -9177,7 +9453,7 @@
       </p:sp>
       <p:sp>
         <p:nvSpPr>
-          <p:cNvPr id="17" name="lbl_4_s4"/>
+          <p:cNvPr id="18" name="lbl_4_s4"/>
           <p:cNvSpPr txBox="1"/>
           <p:nvPr/>
         </p:nvSpPr>
@@ -9203,7 +9479,7 @@
                 <a:solidFill>
                   <a:srgbClr val="9CA3AF"/>
                 </a:solidFill>
-                <a:latin typeface="Arial"/>
+                <a:latin typeface="Calibri"/>
               </a:rPr>
               <a:t>~21.05.2026</a:t>
             </a:r>
@@ -9212,7 +9488,7 @@
       </p:sp>
       <p:sp>
         <p:nvSpPr>
-          <p:cNvPr id="18" name="!!tl_dot_5"/>
+          <p:cNvPr id="19" name="!!tl_dot_5"/>
           <p:cNvSpPr/>
           <p:nvPr/>
         </p:nvSpPr>
@@ -9225,7 +9501,7 @@
             <a:avLst/>
           </a:prstGeom>
           <a:solidFill>
-            <a:srgbClr val="245C9E"/>
+            <a:srgbClr val="325786"/>
           </a:solidFill>
           <a:ln>
             <a:noFill/>
@@ -9256,7 +9532,7 @@
       </p:sp>
       <p:sp>
         <p:nvSpPr>
-          <p:cNvPr id="19" name="lbl_5_s4"/>
+          <p:cNvPr id="20" name="lbl_5_s4"/>
           <p:cNvSpPr txBox="1"/>
           <p:nvPr/>
         </p:nvSpPr>
@@ -9282,7 +9558,7 @@
                 <a:solidFill>
                   <a:srgbClr val="1F2023"/>
                 </a:solidFill>
-                <a:latin typeface="Arial"/>
+                <a:latin typeface="Calibri"/>
               </a:rPr>
               <a:t>18.06.2026</a:t>
             </a:r>
@@ -9291,7 +9567,7 @@
       </p:sp>
       <p:sp>
         <p:nvSpPr>
-          <p:cNvPr id="20" name="!!tl_dot_6"/>
+          <p:cNvPr id="21" name="!!tl_dot_6"/>
           <p:cNvSpPr/>
           <p:nvPr/>
         </p:nvSpPr>
@@ -9335,7 +9611,7 @@
       </p:sp>
       <p:sp>
         <p:nvSpPr>
-          <p:cNvPr id="21" name="lbl_6_s4"/>
+          <p:cNvPr id="22" name="lbl_6_s4"/>
           <p:cNvSpPr txBox="1"/>
           <p:nvPr/>
         </p:nvSpPr>
@@ -9361,7 +9637,7 @@
                 <a:solidFill>
                   <a:srgbClr val="9CA3AF"/>
                 </a:solidFill>
-                <a:latin typeface="Arial"/>
+                <a:latin typeface="Calibri"/>
               </a:rPr>
               <a:t>25.06.2026</a:t>
             </a:r>
@@ -9370,7 +9646,7 @@
       </p:sp>
       <p:sp>
         <p:nvSpPr>
-          <p:cNvPr id="22" name="!!tl_dot_7"/>
+          <p:cNvPr id="23" name="!!tl_dot_7"/>
           <p:cNvSpPr/>
           <p:nvPr/>
         </p:nvSpPr>
@@ -9414,7 +9690,7 @@
       </p:sp>
       <p:sp>
         <p:nvSpPr>
-          <p:cNvPr id="23" name="lbl_7_s4"/>
+          <p:cNvPr id="24" name="lbl_7_s4"/>
           <p:cNvSpPr txBox="1"/>
           <p:nvPr/>
         </p:nvSpPr>
@@ -9440,7 +9716,7 @@
                 <a:solidFill>
                   <a:srgbClr val="9CA3AF"/>
                 </a:solidFill>
-                <a:latin typeface="Arial"/>
+                <a:latin typeface="Calibri"/>
               </a:rPr>
               <a:t>09.07.2026</a:t>
             </a:r>
@@ -9449,7 +9725,7 @@
       </p:sp>
       <p:sp>
         <p:nvSpPr>
-          <p:cNvPr id="24" name="!!tl_dot_8"/>
+          <p:cNvPr id="25" name="!!tl_dot_8"/>
           <p:cNvSpPr/>
           <p:nvPr/>
         </p:nvSpPr>
@@ -9493,7 +9769,7 @@
       </p:sp>
       <p:sp>
         <p:nvSpPr>
-          <p:cNvPr id="25" name="lbl_8_s4"/>
+          <p:cNvPr id="26" name="lbl_8_s4"/>
           <p:cNvSpPr txBox="1"/>
           <p:nvPr/>
         </p:nvSpPr>
@@ -9519,7 +9795,7 @@
                 <a:solidFill>
                   <a:srgbClr val="9CA3AF"/>
                 </a:solidFill>
-                <a:latin typeface="Arial"/>
+                <a:latin typeface="Calibri"/>
               </a:rPr>
               <a:t>16.07.2026</a:t>
             </a:r>
@@ -9528,7 +9804,7 @@
       </p:sp>
       <p:sp>
         <p:nvSpPr>
-          <p:cNvPr id="26" name="!!tl_dot_9"/>
+          <p:cNvPr id="27" name="!!tl_dot_9"/>
           <p:cNvSpPr/>
           <p:nvPr/>
         </p:nvSpPr>
@@ -9572,7 +9848,7 @@
       </p:sp>
       <p:sp>
         <p:nvSpPr>
-          <p:cNvPr id="27" name="lbl_9_s4"/>
+          <p:cNvPr id="28" name="lbl_9_s4"/>
           <p:cNvSpPr txBox="1"/>
           <p:nvPr/>
         </p:nvSpPr>
@@ -9598,7 +9874,7 @@
                 <a:solidFill>
                   <a:srgbClr val="9CA3AF"/>
                 </a:solidFill>
-                <a:latin typeface="Arial"/>
+                <a:latin typeface="Calibri"/>
               </a:rPr>
               <a:t>20.07.2026</a:t>
             </a:r>
@@ -9661,9 +9937,9 @@
             <a:r>
               <a:rPr sz="4200" b="1">
                 <a:solidFill>
-                  <a:srgbClr val="1F2023"/>
-                </a:solidFill>
-                <a:latin typeface="Arial"/>
+                  <a:srgbClr val="808080"/>
+                </a:solidFill>
+                <a:latin typeface="Calibri"/>
               </a:rPr>
               <a:t>FL-Trilemma: Project Timeline</a:t>
             </a:r>
@@ -9698,16 +9974,52 @@
                 <a:solidFill>
                   <a:srgbClr val="6B7280"/>
                 </a:solidFill>
-                <a:latin typeface="Arial"/>
+                <a:latin typeface="Calibri"/>
               </a:rPr>
               <a:t>From kick-off to final presentation</a:t>
             </a:r>
           </a:p>
         </p:txBody>
       </p:sp>
-      <p:sp>
-        <p:nvSpPr>
-          <p:cNvPr id="4" name="content_placeholder_m5"/>
+      <p:cxnSp>
+        <p:nvCxnSpPr>
+          <p:cNvPr id="4" name="divider_m5"/>
+          <p:cNvCxnSpPr/>
+          <p:nvPr/>
+        </p:nvCxnSpPr>
+        <p:spPr>
+          <a:xfrm>
+            <a:off x="1143000" y="1905000"/>
+            <a:ext cx="16002000" cy="0"/>
+          </a:xfrm>
+          <a:prstGeom prst="line">
+            <a:avLst/>
+          </a:prstGeom>
+          <a:ln w="19050">
+            <a:solidFill>
+              <a:srgbClr val="B3B3B3"/>
+            </a:solidFill>
+          </a:ln>
+          <a:effectLst/>
+        </p:spPr>
+        <p:style>
+          <a:lnRef idx="2">
+            <a:schemeClr val="accent1"/>
+          </a:lnRef>
+          <a:fillRef idx="0">
+            <a:schemeClr val="accent1"/>
+          </a:fillRef>
+          <a:effectRef idx="1">
+            <a:schemeClr val="accent1"/>
+          </a:effectRef>
+          <a:fontRef idx="minor">
+            <a:schemeClr val="tx1"/>
+          </a:fontRef>
+        </p:style>
+      </p:cxnSp>
+      <p:sp>
+        <p:nvSpPr>
+          <p:cNvPr id="5" name="content_placeholder_m5"/>
           <p:cNvSpPr/>
           <p:nvPr/>
         </p:nvSpPr>
@@ -9765,7 +10077,7 @@
       </p:sp>
       <p:sp>
         <p:nvSpPr>
-          <p:cNvPr id="5" name="content_pill_m5"/>
+          <p:cNvPr id="6" name="content_pill_m5"/>
           <p:cNvSpPr/>
           <p:nvPr/>
         </p:nvSpPr>
@@ -9780,7 +10092,7 @@
             </a:avLst>
           </a:prstGeom>
           <a:solidFill>
-            <a:srgbClr val="EAF1FB"/>
+            <a:srgbClr val="C9E1FF"/>
           </a:solidFill>
           <a:ln>
             <a:noFill/>
@@ -9809,9 +10121,9 @@
             <a:r>
               <a:rPr sz="1800" b="1">
                 <a:solidFill>
-                  <a:srgbClr val="245C9E"/>
-                </a:solidFill>
-                <a:latin typeface="Arial"/>
+                  <a:srgbClr val="325786"/>
+                </a:solidFill>
+                <a:latin typeface="Calibri"/>
               </a:rPr>
               <a:t>25.06.2026</a:t>
             </a:r>
@@ -9820,7 +10132,7 @@
       </p:sp>
       <p:sp>
         <p:nvSpPr>
-          <p:cNvPr id="6" name="content_headline_m5"/>
+          <p:cNvPr id="7" name="content_headline_m5"/>
           <p:cNvSpPr txBox="1"/>
           <p:nvPr/>
         </p:nvSpPr>
@@ -9846,7 +10158,7 @@
                 <a:solidFill>
                   <a:srgbClr val="1F2023"/>
                 </a:solidFill>
-                <a:latin typeface="Arial"/>
+                <a:latin typeface="Calibri"/>
               </a:rPr>
               <a:t>Interim Presentation 2</a:t>
             </a:r>
@@ -9855,7 +10167,7 @@
       </p:sp>
       <p:sp>
         <p:nvSpPr>
-          <p:cNvPr id="7" name="content_bullets_m5"/>
+          <p:cNvPr id="8" name="content_bullets_m5"/>
           <p:cNvSpPr txBox="1"/>
           <p:nvPr/>
         </p:nvSpPr>
@@ -9883,18 +10195,18 @@
             <a:r>
               <a:rPr sz="1950" b="1">
                 <a:solidFill>
-                  <a:srgbClr val="245C9E"/>
-                </a:solidFill>
-                <a:latin typeface="Arial"/>
+                  <a:srgbClr val="C1212A"/>
+                </a:solidFill>
+                <a:latin typeface="Calibri"/>
               </a:rPr>
               <a:t>-  </a:t>
             </a:r>
             <a:r>
               <a:rPr sz="1950">
                 <a:solidFill>
-                  <a:srgbClr val="4B5563"/>
-                </a:solidFill>
-                <a:latin typeface="Arial"/>
+                  <a:srgbClr val="325786"/>
+                </a:solidFill>
+                <a:latin typeface="Calibri"/>
               </a:rPr>
               <a:t>Mechanisms implemented albeit partly flawed (DP, FLTrust, TopK)</a:t>
             </a:r>
@@ -9908,18 +10220,18 @@
             <a:r>
               <a:rPr sz="1950" b="1">
                 <a:solidFill>
-                  <a:srgbClr val="245C9E"/>
-                </a:solidFill>
-                <a:latin typeface="Arial"/>
+                  <a:srgbClr val="C1212A"/>
+                </a:solidFill>
+                <a:latin typeface="Calibri"/>
               </a:rPr>
               <a:t>-  </a:t>
             </a:r>
             <a:r>
               <a:rPr sz="1950">
                 <a:solidFill>
-                  <a:srgbClr val="4B5563"/>
-                </a:solidFill>
-                <a:latin typeface="Arial"/>
+                  <a:srgbClr val="325786"/>
+                </a:solidFill>
+                <a:latin typeface="Calibri"/>
               </a:rPr>
               <a:t>Testing extremely slow due to missing resources</a:t>
             </a:r>
@@ -9928,7 +10240,7 @@
       </p:sp>
       <p:sp>
         <p:nvSpPr>
-          <p:cNvPr id="8" name="!!tl_track"/>
+          <p:cNvPr id="9" name="!!tl_track"/>
           <p:cNvSpPr/>
           <p:nvPr/>
         </p:nvSpPr>
@@ -9974,7 +10286,7 @@
       </p:sp>
       <p:sp>
         <p:nvSpPr>
-          <p:cNvPr id="9" name="!!tl_fill"/>
+          <p:cNvPr id="10" name="!!tl_fill"/>
           <p:cNvSpPr/>
           <p:nvPr/>
         </p:nvSpPr>
@@ -9989,7 +10301,7 @@
             </a:avLst>
           </a:prstGeom>
           <a:solidFill>
-            <a:srgbClr val="245C9E"/>
+            <a:srgbClr val="325786"/>
           </a:solidFill>
           <a:ln>
             <a:noFill/>
@@ -10020,7 +10332,7 @@
       </p:sp>
       <p:sp>
         <p:nvSpPr>
-          <p:cNvPr id="10" name="!!tl_dot_1"/>
+          <p:cNvPr id="11" name="!!tl_dot_1"/>
           <p:cNvSpPr/>
           <p:nvPr/>
         </p:nvSpPr>
@@ -10064,7 +10376,7 @@
       </p:sp>
       <p:sp>
         <p:nvSpPr>
-          <p:cNvPr id="11" name="lbl_1_s5"/>
+          <p:cNvPr id="12" name="lbl_1_s5"/>
           <p:cNvSpPr txBox="1"/>
           <p:nvPr/>
         </p:nvSpPr>
@@ -10090,7 +10402,7 @@
                 <a:solidFill>
                   <a:srgbClr val="9CA3AF"/>
                 </a:solidFill>
-                <a:latin typeface="Arial"/>
+                <a:latin typeface="Calibri"/>
               </a:rPr>
               <a:t>09.04.2026</a:t>
             </a:r>
@@ -10099,7 +10411,7 @@
       </p:sp>
       <p:sp>
         <p:nvSpPr>
-          <p:cNvPr id="12" name="!!tl_dot_2"/>
+          <p:cNvPr id="13" name="!!tl_dot_2"/>
           <p:cNvSpPr/>
           <p:nvPr/>
         </p:nvSpPr>
@@ -10143,7 +10455,7 @@
       </p:sp>
       <p:sp>
         <p:nvSpPr>
-          <p:cNvPr id="13" name="lbl_2_s5"/>
+          <p:cNvPr id="14" name="lbl_2_s5"/>
           <p:cNvSpPr txBox="1"/>
           <p:nvPr/>
         </p:nvSpPr>
@@ -10169,7 +10481,7 @@
                 <a:solidFill>
                   <a:srgbClr val="9CA3AF"/>
                 </a:solidFill>
-                <a:latin typeface="Arial"/>
+                <a:latin typeface="Calibri"/>
               </a:rPr>
               <a:t>16.04.2026</a:t>
             </a:r>
@@ -10178,7 +10490,7 @@
       </p:sp>
       <p:sp>
         <p:nvSpPr>
-          <p:cNvPr id="14" name="!!tl_dot_3"/>
+          <p:cNvPr id="15" name="!!tl_dot_3"/>
           <p:cNvSpPr/>
           <p:nvPr/>
         </p:nvSpPr>
@@ -10222,7 +10534,7 @@
       </p:sp>
       <p:sp>
         <p:nvSpPr>
-          <p:cNvPr id="15" name="lbl_3_s5"/>
+          <p:cNvPr id="16" name="lbl_3_s5"/>
           <p:cNvSpPr txBox="1"/>
           <p:nvPr/>
         </p:nvSpPr>
@@ -10248,7 +10560,7 @@
                 <a:solidFill>
                   <a:srgbClr val="9CA3AF"/>
                 </a:solidFill>
-                <a:latin typeface="Arial"/>
+                <a:latin typeface="Calibri"/>
               </a:rPr>
               <a:t>30.04.2026</a:t>
             </a:r>
@@ -10257,7 +10569,7 @@
       </p:sp>
       <p:sp>
         <p:nvSpPr>
-          <p:cNvPr id="16" name="!!tl_dot_4"/>
+          <p:cNvPr id="17" name="!!tl_dot_4"/>
           <p:cNvSpPr/>
           <p:nvPr/>
         </p:nvSpPr>
@@ -10301,7 +10613,7 @@
       </p:sp>
       <p:sp>
         <p:nvSpPr>
-          <p:cNvPr id="17" name="lbl_4_s5"/>
+          <p:cNvPr id="18" name="lbl_4_s5"/>
           <p:cNvSpPr txBox="1"/>
           <p:nvPr/>
         </p:nvSpPr>
@@ -10327,7 +10639,7 @@
                 <a:solidFill>
                   <a:srgbClr val="9CA3AF"/>
                 </a:solidFill>
-                <a:latin typeface="Arial"/>
+                <a:latin typeface="Calibri"/>
               </a:rPr>
               <a:t>~21.05.2026</a:t>
             </a:r>
@@ -10336,7 +10648,7 @@
       </p:sp>
       <p:sp>
         <p:nvSpPr>
-          <p:cNvPr id="18" name="!!tl_dot_5"/>
+          <p:cNvPr id="19" name="!!tl_dot_5"/>
           <p:cNvSpPr/>
           <p:nvPr/>
         </p:nvSpPr>
@@ -10380,7 +10692,7 @@
       </p:sp>
       <p:sp>
         <p:nvSpPr>
-          <p:cNvPr id="19" name="lbl_5_s5"/>
+          <p:cNvPr id="20" name="lbl_5_s5"/>
           <p:cNvSpPr txBox="1"/>
           <p:nvPr/>
         </p:nvSpPr>
@@ -10406,7 +10718,7 @@
                 <a:solidFill>
                   <a:srgbClr val="9CA3AF"/>
                 </a:solidFill>
-                <a:latin typeface="Arial"/>
+                <a:latin typeface="Calibri"/>
               </a:rPr>
               <a:t>18.06.2026</a:t>
             </a:r>
@@ -10415,7 +10727,7 @@
       </p:sp>
       <p:sp>
         <p:nvSpPr>
-          <p:cNvPr id="20" name="!!tl_dot_6"/>
+          <p:cNvPr id="21" name="!!tl_dot_6"/>
           <p:cNvSpPr/>
           <p:nvPr/>
         </p:nvSpPr>
@@ -10428,7 +10740,7 @@
             <a:avLst/>
           </a:prstGeom>
           <a:solidFill>
-            <a:srgbClr val="245C9E"/>
+            <a:srgbClr val="325786"/>
           </a:solidFill>
           <a:ln>
             <a:noFill/>
@@ -10459,7 +10771,7 @@
       </p:sp>
       <p:sp>
         <p:nvSpPr>
-          <p:cNvPr id="21" name="lbl_6_s5"/>
+          <p:cNvPr id="22" name="lbl_6_s5"/>
           <p:cNvSpPr txBox="1"/>
           <p:nvPr/>
         </p:nvSpPr>
@@ -10485,7 +10797,7 @@
                 <a:solidFill>
                   <a:srgbClr val="1F2023"/>
                 </a:solidFill>
-                <a:latin typeface="Arial"/>
+                <a:latin typeface="Calibri"/>
               </a:rPr>
               <a:t>25.06.2026</a:t>
             </a:r>
@@ -10494,7 +10806,7 @@
       </p:sp>
       <p:sp>
         <p:nvSpPr>
-          <p:cNvPr id="22" name="!!tl_dot_7"/>
+          <p:cNvPr id="23" name="!!tl_dot_7"/>
           <p:cNvSpPr/>
           <p:nvPr/>
         </p:nvSpPr>
@@ -10538,7 +10850,7 @@
       </p:sp>
       <p:sp>
         <p:nvSpPr>
-          <p:cNvPr id="23" name="lbl_7_s5"/>
+          <p:cNvPr id="24" name="lbl_7_s5"/>
           <p:cNvSpPr txBox="1"/>
           <p:nvPr/>
         </p:nvSpPr>
@@ -10564,7 +10876,7 @@
                 <a:solidFill>
                   <a:srgbClr val="9CA3AF"/>
                 </a:solidFill>
-                <a:latin typeface="Arial"/>
+                <a:latin typeface="Calibri"/>
               </a:rPr>
               <a:t>09.07.2026</a:t>
             </a:r>
@@ -10573,7 +10885,7 @@
       </p:sp>
       <p:sp>
         <p:nvSpPr>
-          <p:cNvPr id="24" name="!!tl_dot_8"/>
+          <p:cNvPr id="25" name="!!tl_dot_8"/>
           <p:cNvSpPr/>
           <p:nvPr/>
         </p:nvSpPr>
@@ -10617,7 +10929,7 @@
       </p:sp>
       <p:sp>
         <p:nvSpPr>
-          <p:cNvPr id="25" name="lbl_8_s5"/>
+          <p:cNvPr id="26" name="lbl_8_s5"/>
           <p:cNvSpPr txBox="1"/>
           <p:nvPr/>
         </p:nvSpPr>
@@ -10643,7 +10955,7 @@
                 <a:solidFill>
                   <a:srgbClr val="9CA3AF"/>
                 </a:solidFill>
-                <a:latin typeface="Arial"/>
+                <a:latin typeface="Calibri"/>
               </a:rPr>
               <a:t>16.07.2026</a:t>
             </a:r>
@@ -10652,7 +10964,7 @@
       </p:sp>
       <p:sp>
         <p:nvSpPr>
-          <p:cNvPr id="26" name="!!tl_dot_9"/>
+          <p:cNvPr id="27" name="!!tl_dot_9"/>
           <p:cNvSpPr/>
           <p:nvPr/>
         </p:nvSpPr>
@@ -10696,7 +11008,7 @@
       </p:sp>
       <p:sp>
         <p:nvSpPr>
-          <p:cNvPr id="27" name="lbl_9_s5"/>
+          <p:cNvPr id="28" name="lbl_9_s5"/>
           <p:cNvSpPr txBox="1"/>
           <p:nvPr/>
         </p:nvSpPr>
@@ -10722,7 +11034,7 @@
                 <a:solidFill>
                   <a:srgbClr val="9CA3AF"/>
                 </a:solidFill>
-                <a:latin typeface="Arial"/>
+                <a:latin typeface="Calibri"/>
               </a:rPr>
               <a:t>20.07.2026</a:t>
             </a:r>
@@ -10785,9 +11097,9 @@
             <a:r>
               <a:rPr sz="4200" b="1">
                 <a:solidFill>
-                  <a:srgbClr val="1F2023"/>
-                </a:solidFill>
-                <a:latin typeface="Arial"/>
+                  <a:srgbClr val="808080"/>
+                </a:solidFill>
+                <a:latin typeface="Calibri"/>
               </a:rPr>
               <a:t>FL-Trilemma: Project Timeline</a:t>
             </a:r>
@@ -10822,16 +11134,52 @@
                 <a:solidFill>
                   <a:srgbClr val="6B7280"/>
                 </a:solidFill>
-                <a:latin typeface="Arial"/>
+                <a:latin typeface="Calibri"/>
               </a:rPr>
               <a:t>From kick-off to final presentation</a:t>
             </a:r>
           </a:p>
         </p:txBody>
       </p:sp>
-      <p:sp>
-        <p:nvSpPr>
-          <p:cNvPr id="4" name="content_placeholder_m6"/>
+      <p:cxnSp>
+        <p:nvCxnSpPr>
+          <p:cNvPr id="4" name="divider_m6"/>
+          <p:cNvCxnSpPr/>
+          <p:nvPr/>
+        </p:nvCxnSpPr>
+        <p:spPr>
+          <a:xfrm>
+            <a:off x="1143000" y="1905000"/>
+            <a:ext cx="16002000" cy="0"/>
+          </a:xfrm>
+          <a:prstGeom prst="line">
+            <a:avLst/>
+          </a:prstGeom>
+          <a:ln w="19050">
+            <a:solidFill>
+              <a:srgbClr val="B3B3B3"/>
+            </a:solidFill>
+          </a:ln>
+          <a:effectLst/>
+        </p:spPr>
+        <p:style>
+          <a:lnRef idx="2">
+            <a:schemeClr val="accent1"/>
+          </a:lnRef>
+          <a:fillRef idx="0">
+            <a:schemeClr val="accent1"/>
+          </a:fillRef>
+          <a:effectRef idx="1">
+            <a:schemeClr val="accent1"/>
+          </a:effectRef>
+          <a:fontRef idx="minor">
+            <a:schemeClr val="tx1"/>
+          </a:fontRef>
+        </p:style>
+      </p:cxnSp>
+      <p:sp>
+        <p:nvSpPr>
+          <p:cNvPr id="5" name="content_placeholder_m6"/>
           <p:cNvSpPr/>
           <p:nvPr/>
         </p:nvSpPr>
@@ -10889,7 +11237,7 @@
       </p:sp>
       <p:sp>
         <p:nvSpPr>
-          <p:cNvPr id="5" name="content_pill_m6"/>
+          <p:cNvPr id="6" name="content_pill_m6"/>
           <p:cNvSpPr/>
           <p:nvPr/>
         </p:nvSpPr>
@@ -10904,7 +11252,7 @@
             </a:avLst>
           </a:prstGeom>
           <a:solidFill>
-            <a:srgbClr val="EAF1FB"/>
+            <a:srgbClr val="C9E1FF"/>
           </a:solidFill>
           <a:ln>
             <a:noFill/>
@@ -10933,9 +11281,9 @@
             <a:r>
               <a:rPr sz="1800" b="1">
                 <a:solidFill>
-                  <a:srgbClr val="245C9E"/>
-                </a:solidFill>
-                <a:latin typeface="Arial"/>
+                  <a:srgbClr val="325786"/>
+                </a:solidFill>
+                <a:latin typeface="Calibri"/>
               </a:rPr>
               <a:t>09.07.2026</a:t>
             </a:r>
@@ -10944,7 +11292,7 @@
       </p:sp>
       <p:sp>
         <p:nvSpPr>
-          <p:cNvPr id="6" name="content_headline_m6"/>
+          <p:cNvPr id="7" name="content_headline_m6"/>
           <p:cNvSpPr txBox="1"/>
           <p:nvPr/>
         </p:nvSpPr>
@@ -10970,7 +11318,7 @@
                 <a:solidFill>
                   <a:srgbClr val="1F2023"/>
                 </a:solidFill>
-                <a:latin typeface="Arial"/>
+                <a:latin typeface="Calibri"/>
               </a:rPr>
               <a:t>Unlock of Computational Resources</a:t>
             </a:r>
@@ -10979,7 +11327,7 @@
       </p:sp>
       <p:sp>
         <p:nvSpPr>
-          <p:cNvPr id="7" name="content_bullets_m6"/>
+          <p:cNvPr id="8" name="content_bullets_m6"/>
           <p:cNvSpPr txBox="1"/>
           <p:nvPr/>
         </p:nvSpPr>
@@ -11007,18 +11355,18 @@
             <a:r>
               <a:rPr sz="1950" b="1">
                 <a:solidFill>
-                  <a:srgbClr val="245C9E"/>
-                </a:solidFill>
-                <a:latin typeface="Arial"/>
+                  <a:srgbClr val="C1212A"/>
+                </a:solidFill>
+                <a:latin typeface="Calibri"/>
               </a:rPr>
               <a:t>-  </a:t>
             </a:r>
             <a:r>
               <a:rPr sz="1950">
                 <a:solidFill>
-                  <a:srgbClr val="4B5563"/>
-                </a:solidFill>
-                <a:latin typeface="Arial"/>
+                  <a:srgbClr val="325786"/>
+                </a:solidFill>
+                <a:latin typeface="Calibri"/>
               </a:rPr>
               <a:t>Larger scale testing unlocked</a:t>
             </a:r>
@@ -11032,18 +11380,18 @@
             <a:r>
               <a:rPr sz="1950" b="1">
                 <a:solidFill>
-                  <a:srgbClr val="245C9E"/>
-                </a:solidFill>
-                <a:latin typeface="Arial"/>
+                  <a:srgbClr val="C1212A"/>
+                </a:solidFill>
+                <a:latin typeface="Calibri"/>
               </a:rPr>
               <a:t>-  </a:t>
             </a:r>
             <a:r>
               <a:rPr sz="1950">
                 <a:solidFill>
-                  <a:srgbClr val="4B5563"/>
-                </a:solidFill>
-                <a:latin typeface="Arial"/>
+                  <a:srgbClr val="325786"/>
+                </a:solidFill>
+                <a:latin typeface="Calibri"/>
               </a:rPr>
               <a:t>GPU access and incrementally stable code foundation allows for CIFAR-10 testing</a:t>
             </a:r>
@@ -11057,18 +11405,18 @@
             <a:r>
               <a:rPr sz="1950" b="1">
                 <a:solidFill>
-                  <a:srgbClr val="245C9E"/>
-                </a:solidFill>
-                <a:latin typeface="Arial"/>
+                  <a:srgbClr val="C1212A"/>
+                </a:solidFill>
+                <a:latin typeface="Calibri"/>
               </a:rPr>
               <a:t>-  </a:t>
             </a:r>
             <a:r>
               <a:rPr sz="1950">
                 <a:solidFill>
-                  <a:srgbClr val="4B5563"/>
-                </a:solidFill>
-                <a:latin typeface="Arial"/>
+                  <a:srgbClr val="325786"/>
+                </a:solidFill>
+                <a:latin typeface="Calibri"/>
               </a:rPr>
               <a:t>First results for large runs are coming through</a:t>
             </a:r>
@@ -11077,7 +11425,7 @@
       </p:sp>
       <p:sp>
         <p:nvSpPr>
-          <p:cNvPr id="8" name="!!tl_track"/>
+          <p:cNvPr id="9" name="!!tl_track"/>
           <p:cNvSpPr/>
           <p:nvPr/>
         </p:nvSpPr>
@@ -11123,7 +11471,7 @@
       </p:sp>
       <p:sp>
         <p:nvSpPr>
-          <p:cNvPr id="9" name="!!tl_fill"/>
+          <p:cNvPr id="10" name="!!tl_fill"/>
           <p:cNvSpPr/>
           <p:nvPr/>
         </p:nvSpPr>
@@ -11138,7 +11486,7 @@
             </a:avLst>
           </a:prstGeom>
           <a:solidFill>
-            <a:srgbClr val="245C9E"/>
+            <a:srgbClr val="325786"/>
           </a:solidFill>
           <a:ln>
             <a:noFill/>
@@ -11169,7 +11517,7 @@
       </p:sp>
       <p:sp>
         <p:nvSpPr>
-          <p:cNvPr id="10" name="!!tl_dot_1"/>
+          <p:cNvPr id="11" name="!!tl_dot_1"/>
           <p:cNvSpPr/>
           <p:nvPr/>
         </p:nvSpPr>
@@ -11213,7 +11561,7 @@
       </p:sp>
       <p:sp>
         <p:nvSpPr>
-          <p:cNvPr id="11" name="lbl_1_s6"/>
+          <p:cNvPr id="12" name="lbl_1_s6"/>
           <p:cNvSpPr txBox="1"/>
           <p:nvPr/>
         </p:nvSpPr>
@@ -11239,7 +11587,7 @@
                 <a:solidFill>
                   <a:srgbClr val="9CA3AF"/>
                 </a:solidFill>
-                <a:latin typeface="Arial"/>
+                <a:latin typeface="Calibri"/>
               </a:rPr>
               <a:t>09.04.2026</a:t>
             </a:r>
@@ -11248,7 +11596,7 @@
       </p:sp>
       <p:sp>
         <p:nvSpPr>
-          <p:cNvPr id="12" name="!!tl_dot_2"/>
+          <p:cNvPr id="13" name="!!tl_dot_2"/>
           <p:cNvSpPr/>
           <p:nvPr/>
         </p:nvSpPr>
@@ -11292,7 +11640,7 @@
       </p:sp>
       <p:sp>
         <p:nvSpPr>
-          <p:cNvPr id="13" name="lbl_2_s6"/>
+          <p:cNvPr id="14" name="lbl_2_s6"/>
           <p:cNvSpPr txBox="1"/>
           <p:nvPr/>
         </p:nvSpPr>
@@ -11318,7 +11666,7 @@
                 <a:solidFill>
                   <a:srgbClr val="9CA3AF"/>
                 </a:solidFill>
-                <a:latin typeface="Arial"/>
+                <a:latin typeface="Calibri"/>
               </a:rPr>
               <a:t>16.04.2026</a:t>
             </a:r>
@@ -11327,7 +11675,7 @@
       </p:sp>
       <p:sp>
         <p:nvSpPr>
-          <p:cNvPr id="14" name="!!tl_dot_3"/>
+          <p:cNvPr id="15" name="!!tl_dot_3"/>
           <p:cNvSpPr/>
           <p:nvPr/>
         </p:nvSpPr>
@@ -11371,7 +11719,7 @@
       </p:sp>
       <p:sp>
         <p:nvSpPr>
-          <p:cNvPr id="15" name="lbl_3_s6"/>
+          <p:cNvPr id="16" name="lbl_3_s6"/>
           <p:cNvSpPr txBox="1"/>
           <p:nvPr/>
         </p:nvSpPr>
@@ -11397,7 +11745,7 @@
                 <a:solidFill>
                   <a:srgbClr val="9CA3AF"/>
                 </a:solidFill>
-                <a:latin typeface="Arial"/>
+                <a:latin typeface="Calibri"/>
               </a:rPr>
               <a:t>30.04.2026</a:t>
             </a:r>
@@ -11406,7 +11754,7 @@
       </p:sp>
       <p:sp>
         <p:nvSpPr>
-          <p:cNvPr id="16" name="!!tl_dot_4"/>
+          <p:cNvPr id="17" name="!!tl_dot_4"/>
           <p:cNvSpPr/>
           <p:nvPr/>
         </p:nvSpPr>
@@ -11450,7 +11798,7 @@
       </p:sp>
       <p:sp>
         <p:nvSpPr>
-          <p:cNvPr id="17" name="lbl_4_s6"/>
+          <p:cNvPr id="18" name="lbl_4_s6"/>
           <p:cNvSpPr txBox="1"/>
           <p:nvPr/>
         </p:nvSpPr>
@@ -11476,7 +11824,7 @@
                 <a:solidFill>
                   <a:srgbClr val="9CA3AF"/>
                 </a:solidFill>
-                <a:latin typeface="Arial"/>
+                <a:latin typeface="Calibri"/>
               </a:rPr>
               <a:t>~21.05.2026</a:t>
             </a:r>
@@ -11485,7 +11833,7 @@
       </p:sp>
       <p:sp>
         <p:nvSpPr>
-          <p:cNvPr id="18" name="!!tl_dot_5"/>
+          <p:cNvPr id="19" name="!!tl_dot_5"/>
           <p:cNvSpPr/>
           <p:nvPr/>
         </p:nvSpPr>
@@ -11529,7 +11877,7 @@
       </p:sp>
       <p:sp>
         <p:nvSpPr>
-          <p:cNvPr id="19" name="lbl_5_s6"/>
+          <p:cNvPr id="20" name="lbl_5_s6"/>
           <p:cNvSpPr txBox="1"/>
           <p:nvPr/>
         </p:nvSpPr>
@@ -11555,7 +11903,7 @@
                 <a:solidFill>
                   <a:srgbClr val="9CA3AF"/>
                 </a:solidFill>
-                <a:latin typeface="Arial"/>
+                <a:latin typeface="Calibri"/>
               </a:rPr>
               <a:t>18.06.2026</a:t>
             </a:r>
@@ -11564,7 +11912,7 @@
       </p:sp>
       <p:sp>
         <p:nvSpPr>
-          <p:cNvPr id="20" name="!!tl_dot_6"/>
+          <p:cNvPr id="21" name="!!tl_dot_6"/>
           <p:cNvSpPr/>
           <p:nvPr/>
         </p:nvSpPr>
@@ -11608,7 +11956,7 @@
       </p:sp>
       <p:sp>
         <p:nvSpPr>
-          <p:cNvPr id="21" name="lbl_6_s6"/>
+          <p:cNvPr id="22" name="lbl_6_s6"/>
           <p:cNvSpPr txBox="1"/>
           <p:nvPr/>
         </p:nvSpPr>
@@ -11634,7 +11982,7 @@
                 <a:solidFill>
                   <a:srgbClr val="9CA3AF"/>
                 </a:solidFill>
-                <a:latin typeface="Arial"/>
+                <a:latin typeface="Calibri"/>
               </a:rPr>
               <a:t>25.06.2026</a:t>
             </a:r>
@@ -11643,7 +11991,7 @@
       </p:sp>
       <p:sp>
         <p:nvSpPr>
-          <p:cNvPr id="22" name="!!tl_dot_7"/>
+          <p:cNvPr id="23" name="!!tl_dot_7"/>
           <p:cNvSpPr/>
           <p:nvPr/>
         </p:nvSpPr>
@@ -11656,7 +12004,7 @@
             <a:avLst/>
           </a:prstGeom>
           <a:solidFill>
-            <a:srgbClr val="245C9E"/>
+            <a:srgbClr val="325786"/>
           </a:solidFill>
           <a:ln>
             <a:noFill/>
@@ -11687,7 +12035,7 @@
       </p:sp>
       <p:sp>
         <p:nvSpPr>
-          <p:cNvPr id="23" name="lbl_7_s6"/>
+          <p:cNvPr id="24" name="lbl_7_s6"/>
           <p:cNvSpPr txBox="1"/>
           <p:nvPr/>
         </p:nvSpPr>
@@ -11713,7 +12061,7 @@
                 <a:solidFill>
                   <a:srgbClr val="1F2023"/>
                 </a:solidFill>
-                <a:latin typeface="Arial"/>
+                <a:latin typeface="Calibri"/>
               </a:rPr>
               <a:t>09.07.2026</a:t>
             </a:r>
@@ -11722,7 +12070,7 @@
       </p:sp>
       <p:sp>
         <p:nvSpPr>
-          <p:cNvPr id="24" name="!!tl_dot_8"/>
+          <p:cNvPr id="25" name="!!tl_dot_8"/>
           <p:cNvSpPr/>
           <p:nvPr/>
         </p:nvSpPr>
@@ -11766,7 +12114,7 @@
       </p:sp>
       <p:sp>
         <p:nvSpPr>
-          <p:cNvPr id="25" name="lbl_8_s6"/>
+          <p:cNvPr id="26" name="lbl_8_s6"/>
           <p:cNvSpPr txBox="1"/>
           <p:nvPr/>
         </p:nvSpPr>
@@ -11792,7 +12140,7 @@
                 <a:solidFill>
                   <a:srgbClr val="9CA3AF"/>
                 </a:solidFill>
-                <a:latin typeface="Arial"/>
+                <a:latin typeface="Calibri"/>
               </a:rPr>
               <a:t>16.07.2026</a:t>
             </a:r>
@@ -11801,7 +12149,7 @@
       </p:sp>
       <p:sp>
         <p:nvSpPr>
-          <p:cNvPr id="26" name="!!tl_dot_9"/>
+          <p:cNvPr id="27" name="!!tl_dot_9"/>
           <p:cNvSpPr/>
           <p:nvPr/>
         </p:nvSpPr>
@@ -11845,7 +12193,7 @@
       </p:sp>
       <p:sp>
         <p:nvSpPr>
-          <p:cNvPr id="27" name="lbl_9_s6"/>
+          <p:cNvPr id="28" name="lbl_9_s6"/>
           <p:cNvSpPr txBox="1"/>
           <p:nvPr/>
         </p:nvSpPr>
@@ -11871,7 +12219,7 @@
                 <a:solidFill>
                   <a:srgbClr val="9CA3AF"/>
                 </a:solidFill>
-                <a:latin typeface="Arial"/>
+                <a:latin typeface="Calibri"/>
               </a:rPr>
               <a:t>20.07.2026</a:t>
             </a:r>
@@ -11934,9 +12282,9 @@
             <a:r>
               <a:rPr sz="4200" b="1">
                 <a:solidFill>
-                  <a:srgbClr val="1F2023"/>
-                </a:solidFill>
-                <a:latin typeface="Arial"/>
+                  <a:srgbClr val="808080"/>
+                </a:solidFill>
+                <a:latin typeface="Calibri"/>
               </a:rPr>
               <a:t>FL-Trilemma: Project Timeline</a:t>
             </a:r>
@@ -11971,16 +12319,52 @@
                 <a:solidFill>
                   <a:srgbClr val="6B7280"/>
                 </a:solidFill>
-                <a:latin typeface="Arial"/>
+                <a:latin typeface="Calibri"/>
               </a:rPr>
               <a:t>From kick-off to final presentation</a:t>
             </a:r>
           </a:p>
         </p:txBody>
       </p:sp>
-      <p:sp>
-        <p:nvSpPr>
-          <p:cNvPr id="4" name="content_pill_m7"/>
+      <p:cxnSp>
+        <p:nvCxnSpPr>
+          <p:cNvPr id="4" name="divider_m7"/>
+          <p:cNvCxnSpPr/>
+          <p:nvPr/>
+        </p:nvCxnSpPr>
+        <p:spPr>
+          <a:xfrm>
+            <a:off x="1143000" y="1905000"/>
+            <a:ext cx="16002000" cy="0"/>
+          </a:xfrm>
+          <a:prstGeom prst="line">
+            <a:avLst/>
+          </a:prstGeom>
+          <a:ln w="19050">
+            <a:solidFill>
+              <a:srgbClr val="B3B3B3"/>
+            </a:solidFill>
+          </a:ln>
+          <a:effectLst/>
+        </p:spPr>
+        <p:style>
+          <a:lnRef idx="2">
+            <a:schemeClr val="accent1"/>
+          </a:lnRef>
+          <a:fillRef idx="0">
+            <a:schemeClr val="accent1"/>
+          </a:fillRef>
+          <a:effectRef idx="1">
+            <a:schemeClr val="accent1"/>
+          </a:effectRef>
+          <a:fontRef idx="minor">
+            <a:schemeClr val="tx1"/>
+          </a:fontRef>
+        </p:style>
+      </p:cxnSp>
+      <p:sp>
+        <p:nvSpPr>
+          <p:cNvPr id="5" name="content_pill_m7"/>
           <p:cNvSpPr/>
           <p:nvPr/>
         </p:nvSpPr>
@@ -11995,7 +12379,7 @@
             </a:avLst>
           </a:prstGeom>
           <a:solidFill>
-            <a:srgbClr val="EAF1FB"/>
+            <a:srgbClr val="C9E1FF"/>
           </a:solidFill>
           <a:ln>
             <a:noFill/>
@@ -12024,9 +12408,9 @@
             <a:r>
               <a:rPr sz="1800" b="1">
                 <a:solidFill>
-                  <a:srgbClr val="245C9E"/>
-                </a:solidFill>
-                <a:latin typeface="Arial"/>
+                  <a:srgbClr val="325786"/>
+                </a:solidFill>
+                <a:latin typeface="Calibri"/>
               </a:rPr>
               <a:t>16.07.2026</a:t>
             </a:r>
@@ -12035,7 +12419,7 @@
       </p:sp>
       <p:sp>
         <p:nvSpPr>
-          <p:cNvPr id="5" name="content_headline_m7"/>
+          <p:cNvPr id="6" name="content_headline_m7"/>
           <p:cNvSpPr txBox="1"/>
           <p:nvPr/>
         </p:nvSpPr>
@@ -12061,7 +12445,7 @@
                 <a:solidFill>
                   <a:srgbClr val="1F2023"/>
                 </a:solidFill>
-                <a:latin typeface="Arial"/>
+                <a:latin typeface="Calibri"/>
               </a:rPr>
               <a:t>Final Report Submission</a:t>
             </a:r>
@@ -12070,7 +12454,7 @@
       </p:sp>
       <p:sp>
         <p:nvSpPr>
-          <p:cNvPr id="6" name="content_bullets_m7"/>
+          <p:cNvPr id="7" name="content_bullets_m7"/>
           <p:cNvSpPr txBox="1"/>
           <p:nvPr/>
         </p:nvSpPr>
@@ -12098,18 +12482,18 @@
             <a:r>
               <a:rPr sz="2100" b="1">
                 <a:solidFill>
-                  <a:srgbClr val="245C9E"/>
-                </a:solidFill>
-                <a:latin typeface="Arial"/>
+                  <a:srgbClr val="C1212A"/>
+                </a:solidFill>
+                <a:latin typeface="Calibri"/>
               </a:rPr>
               <a:t>-  </a:t>
             </a:r>
             <a:r>
               <a:rPr sz="2100">
                 <a:solidFill>
-                  <a:srgbClr val="4B5563"/>
-                </a:solidFill>
-                <a:latin typeface="Arial"/>
+                  <a:srgbClr val="325786"/>
+                </a:solidFill>
+                <a:latin typeface="Calibri"/>
               </a:rPr>
               <a:t>Written report on the Privacy-Robustness-Performance Trilemma due</a:t>
             </a:r>
@@ -12118,7 +12502,7 @@
       </p:sp>
       <p:sp>
         <p:nvSpPr>
-          <p:cNvPr id="7" name="!!tl_track"/>
+          <p:cNvPr id="8" name="!!tl_track"/>
           <p:cNvSpPr/>
           <p:nvPr/>
         </p:nvSpPr>
@@ -12164,7 +12548,7 @@
       </p:sp>
       <p:sp>
         <p:nvSpPr>
-          <p:cNvPr id="8" name="!!tl_fill"/>
+          <p:cNvPr id="9" name="!!tl_fill"/>
           <p:cNvSpPr/>
           <p:nvPr/>
         </p:nvSpPr>
@@ -12179,7 +12563,7 @@
             </a:avLst>
           </a:prstGeom>
           <a:solidFill>
-            <a:srgbClr val="245C9E"/>
+            <a:srgbClr val="325786"/>
           </a:solidFill>
           <a:ln>
             <a:noFill/>
@@ -12210,7 +12594,7 @@
       </p:sp>
       <p:sp>
         <p:nvSpPr>
-          <p:cNvPr id="9" name="!!tl_dot_1"/>
+          <p:cNvPr id="10" name="!!tl_dot_1"/>
           <p:cNvSpPr/>
           <p:nvPr/>
         </p:nvSpPr>
@@ -12254,7 +12638,7 @@
       </p:sp>
       <p:sp>
         <p:nvSpPr>
-          <p:cNvPr id="10" name="lbl_1_s7"/>
+          <p:cNvPr id="11" name="lbl_1_s7"/>
           <p:cNvSpPr txBox="1"/>
           <p:nvPr/>
         </p:nvSpPr>
@@ -12280,7 +12664,7 @@
                 <a:solidFill>
                   <a:srgbClr val="9CA3AF"/>
                 </a:solidFill>
-                <a:latin typeface="Arial"/>
+                <a:latin typeface="Calibri"/>
               </a:rPr>
               <a:t>09.04.2026</a:t>
             </a:r>
@@ -12289,7 +12673,7 @@
       </p:sp>
       <p:sp>
         <p:nvSpPr>
-          <p:cNvPr id="11" name="!!tl_dot_2"/>
+          <p:cNvPr id="12" name="!!tl_dot_2"/>
           <p:cNvSpPr/>
           <p:nvPr/>
         </p:nvSpPr>
@@ -12333,7 +12717,7 @@
       </p:sp>
       <p:sp>
         <p:nvSpPr>
-          <p:cNvPr id="12" name="lbl_2_s7"/>
+          <p:cNvPr id="13" name="lbl_2_s7"/>
           <p:cNvSpPr txBox="1"/>
           <p:nvPr/>
         </p:nvSpPr>
@@ -12359,7 +12743,7 @@
                 <a:solidFill>
                   <a:srgbClr val="9CA3AF"/>
                 </a:solidFill>
-                <a:latin typeface="Arial"/>
+                <a:latin typeface="Calibri"/>
               </a:rPr>
               <a:t>16.04.2026</a:t>
             </a:r>
@@ -12368,7 +12752,7 @@
       </p:sp>
       <p:sp>
         <p:nvSpPr>
-          <p:cNvPr id="13" name="!!tl_dot_3"/>
+          <p:cNvPr id="14" name="!!tl_dot_3"/>
           <p:cNvSpPr/>
           <p:nvPr/>
         </p:nvSpPr>
@@ -12412,7 +12796,7 @@
       </p:sp>
       <p:sp>
         <p:nvSpPr>
-          <p:cNvPr id="14" name="lbl_3_s7"/>
+          <p:cNvPr id="15" name="lbl_3_s7"/>
           <p:cNvSpPr txBox="1"/>
           <p:nvPr/>
         </p:nvSpPr>
@@ -12438,7 +12822,7 @@
                 <a:solidFill>
                   <a:srgbClr val="9CA3AF"/>
                 </a:solidFill>
-                <a:latin typeface="Arial"/>
+                <a:latin typeface="Calibri"/>
               </a:rPr>
               <a:t>30.04.2026</a:t>
             </a:r>
@@ -12447,7 +12831,7 @@
       </p:sp>
       <p:sp>
         <p:nvSpPr>
-          <p:cNvPr id="15" name="!!tl_dot_4"/>
+          <p:cNvPr id="16" name="!!tl_dot_4"/>
           <p:cNvSpPr/>
           <p:nvPr/>
         </p:nvSpPr>
@@ -12491,7 +12875,7 @@
       </p:sp>
       <p:sp>
         <p:nvSpPr>
-          <p:cNvPr id="16" name="lbl_4_s7"/>
+          <p:cNvPr id="17" name="lbl_4_s7"/>
           <p:cNvSpPr txBox="1"/>
           <p:nvPr/>
         </p:nvSpPr>
@@ -12517,7 +12901,7 @@
                 <a:solidFill>
                   <a:srgbClr val="9CA3AF"/>
                 </a:solidFill>
-                <a:latin typeface="Arial"/>
+                <a:latin typeface="Calibri"/>
               </a:rPr>
               <a:t>~21.05.2026</a:t>
             </a:r>
@@ -12526,7 +12910,7 @@
       </p:sp>
       <p:sp>
         <p:nvSpPr>
-          <p:cNvPr id="17" name="!!tl_dot_5"/>
+          <p:cNvPr id="18" name="!!tl_dot_5"/>
           <p:cNvSpPr/>
           <p:nvPr/>
         </p:nvSpPr>
@@ -12570,7 +12954,7 @@
       </p:sp>
       <p:sp>
         <p:nvSpPr>
-          <p:cNvPr id="18" name="lbl_5_s7"/>
+          <p:cNvPr id="19" name="lbl_5_s7"/>
           <p:cNvSpPr txBox="1"/>
           <p:nvPr/>
         </p:nvSpPr>
@@ -12596,7 +12980,7 @@
                 <a:solidFill>
                   <a:srgbClr val="9CA3AF"/>
                 </a:solidFill>
-                <a:latin typeface="Arial"/>
+                <a:latin typeface="Calibri"/>
               </a:rPr>
               <a:t>18.06.2026</a:t>
             </a:r>
@@ -12605,7 +12989,7 @@
       </p:sp>
       <p:sp>
         <p:nvSpPr>
-          <p:cNvPr id="19" name="!!tl_dot_6"/>
+          <p:cNvPr id="20" name="!!tl_dot_6"/>
           <p:cNvSpPr/>
           <p:nvPr/>
         </p:nvSpPr>
@@ -12649,7 +13033,7 @@
       </p:sp>
       <p:sp>
         <p:nvSpPr>
-          <p:cNvPr id="20" name="lbl_6_s7"/>
+          <p:cNvPr id="21" name="lbl_6_s7"/>
           <p:cNvSpPr txBox="1"/>
           <p:nvPr/>
         </p:nvSpPr>
@@ -12675,7 +13059,7 @@
                 <a:solidFill>
                   <a:srgbClr val="9CA3AF"/>
                 </a:solidFill>
-                <a:latin typeface="Arial"/>
+                <a:latin typeface="Calibri"/>
               </a:rPr>
               <a:t>25.06.2026</a:t>
             </a:r>
@@ -12684,7 +13068,7 @@
       </p:sp>
       <p:sp>
         <p:nvSpPr>
-          <p:cNvPr id="21" name="!!tl_dot_7"/>
+          <p:cNvPr id="22" name="!!tl_dot_7"/>
           <p:cNvSpPr/>
           <p:nvPr/>
         </p:nvSpPr>
@@ -12728,7 +13112,7 @@
       </p:sp>
       <p:sp>
         <p:nvSpPr>
-          <p:cNvPr id="22" name="lbl_7_s7"/>
+          <p:cNvPr id="23" name="lbl_7_s7"/>
           <p:cNvSpPr txBox="1"/>
           <p:nvPr/>
         </p:nvSpPr>
@@ -12754,7 +13138,7 @@
                 <a:solidFill>
                   <a:srgbClr val="9CA3AF"/>
                 </a:solidFill>
-                <a:latin typeface="Arial"/>
+                <a:latin typeface="Calibri"/>
               </a:rPr>
               <a:t>09.07.2026</a:t>
             </a:r>
@@ -12763,7 +13147,7 @@
       </p:sp>
       <p:sp>
         <p:nvSpPr>
-          <p:cNvPr id="23" name="!!tl_dot_8"/>
+          <p:cNvPr id="24" name="!!tl_dot_8"/>
           <p:cNvSpPr/>
           <p:nvPr/>
         </p:nvSpPr>
@@ -12776,7 +13160,7 @@
             <a:avLst/>
           </a:prstGeom>
           <a:solidFill>
-            <a:srgbClr val="245C9E"/>
+            <a:srgbClr val="325786"/>
           </a:solidFill>
           <a:ln>
             <a:noFill/>
@@ -12807,7 +13191,7 @@
       </p:sp>
       <p:sp>
         <p:nvSpPr>
-          <p:cNvPr id="24" name="lbl_8_s7"/>
+          <p:cNvPr id="25" name="lbl_8_s7"/>
           <p:cNvSpPr txBox="1"/>
           <p:nvPr/>
         </p:nvSpPr>
@@ -12833,7 +13217,7 @@
                 <a:solidFill>
                   <a:srgbClr val="1F2023"/>
                 </a:solidFill>
-                <a:latin typeface="Arial"/>
+                <a:latin typeface="Calibri"/>
               </a:rPr>
               <a:t>16.07.2026</a:t>
             </a:r>
@@ -12842,7 +13226,7 @@
       </p:sp>
       <p:sp>
         <p:nvSpPr>
-          <p:cNvPr id="25" name="!!tl_dot_9"/>
+          <p:cNvPr id="26" name="!!tl_dot_9"/>
           <p:cNvSpPr/>
           <p:nvPr/>
         </p:nvSpPr>
@@ -12886,7 +13270,7 @@
       </p:sp>
       <p:sp>
         <p:nvSpPr>
-          <p:cNvPr id="26" name="lbl_9_s7"/>
+          <p:cNvPr id="27" name="lbl_9_s7"/>
           <p:cNvSpPr txBox="1"/>
           <p:nvPr/>
         </p:nvSpPr>
@@ -12912,7 +13296,7 @@
                 <a:solidFill>
                   <a:srgbClr val="9CA3AF"/>
                 </a:solidFill>
-                <a:latin typeface="Arial"/>
+                <a:latin typeface="Calibri"/>
               </a:rPr>
               <a:t>20.07.2026</a:t>
             </a:r>
